--- a/docs/PHP_Presentation_Technique.pptx
+++ b/docs/PHP_Presentation_Technique.pptx
@@ -71,20 +71,237 @@
             <a:noAutofit/>
           </a:bodyPr>
           <a:p>
-            <a:r>
-              <a:rPr b="0" lang="fr-FR" sz="1800" spc="-1" strike="noStrike">
-                <a:solidFill>
-                  <a:schemeClr val="dk1"/>
-                </a:solidFill>
-                <a:latin typeface="Calibri"/>
-              </a:rPr>
-              <a:t>Cliquez pour déplacer la diapo</a:t>
-            </a:r>
-            <a:endParaRPr b="0" lang="fr-FR" sz="1800" spc="-1" strike="noStrike">
-              <a:solidFill>
-                <a:schemeClr val="dk1"/>
-              </a:solidFill>
-              <a:latin typeface="Calibri"/>
+            <a:pPr algn="ctr"/>
+            <a:r>
+              <a:rPr b="0" lang="fr-FR" sz="4400" spc="-1" strike="noStrike">
+                <a:solidFill>
+                  <a:srgbClr val="000000"/>
+                </a:solidFill>
+                <a:latin typeface="Arial"/>
+              </a:rPr>
+              <a:t>C</a:t>
+            </a:r>
+            <a:r>
+              <a:rPr b="0" lang="fr-FR" sz="4400" spc="-1" strike="noStrike">
+                <a:solidFill>
+                  <a:srgbClr val="000000"/>
+                </a:solidFill>
+                <a:latin typeface="Arial"/>
+              </a:rPr>
+              <a:t>li</a:t>
+            </a:r>
+            <a:r>
+              <a:rPr b="0" lang="fr-FR" sz="4400" spc="-1" strike="noStrike">
+                <a:solidFill>
+                  <a:srgbClr val="000000"/>
+                </a:solidFill>
+                <a:latin typeface="Arial"/>
+              </a:rPr>
+              <a:t>q</a:t>
+            </a:r>
+            <a:r>
+              <a:rPr b="0" lang="fr-FR" sz="4400" spc="-1" strike="noStrike">
+                <a:solidFill>
+                  <a:srgbClr val="000000"/>
+                </a:solidFill>
+                <a:latin typeface="Arial"/>
+              </a:rPr>
+              <a:t>u</a:t>
+            </a:r>
+            <a:r>
+              <a:rPr b="0" lang="fr-FR" sz="4400" spc="-1" strike="noStrike">
+                <a:solidFill>
+                  <a:srgbClr val="000000"/>
+                </a:solidFill>
+                <a:latin typeface="Arial"/>
+              </a:rPr>
+              <a:t>e</a:t>
+            </a:r>
+            <a:r>
+              <a:rPr b="0" lang="fr-FR" sz="4400" spc="-1" strike="noStrike">
+                <a:solidFill>
+                  <a:srgbClr val="000000"/>
+                </a:solidFill>
+                <a:latin typeface="Arial"/>
+              </a:rPr>
+              <a:t>z </a:t>
+            </a:r>
+            <a:r>
+              <a:rPr b="0" lang="fr-FR" sz="4400" spc="-1" strike="noStrike">
+                <a:solidFill>
+                  <a:srgbClr val="000000"/>
+                </a:solidFill>
+                <a:latin typeface="Arial"/>
+              </a:rPr>
+              <a:t>p</a:t>
+            </a:r>
+            <a:r>
+              <a:rPr b="0" lang="fr-FR" sz="4400" spc="-1" strike="noStrike">
+                <a:solidFill>
+                  <a:srgbClr val="000000"/>
+                </a:solidFill>
+                <a:latin typeface="Arial"/>
+              </a:rPr>
+              <a:t>o</a:t>
+            </a:r>
+            <a:r>
+              <a:rPr b="0" lang="fr-FR" sz="4400" spc="-1" strike="noStrike">
+                <a:solidFill>
+                  <a:srgbClr val="000000"/>
+                </a:solidFill>
+                <a:latin typeface="Arial"/>
+              </a:rPr>
+              <a:t>u</a:t>
+            </a:r>
+            <a:r>
+              <a:rPr b="0" lang="fr-FR" sz="4400" spc="-1" strike="noStrike">
+                <a:solidFill>
+                  <a:srgbClr val="000000"/>
+                </a:solidFill>
+                <a:latin typeface="Arial"/>
+              </a:rPr>
+              <a:t>r </a:t>
+            </a:r>
+            <a:r>
+              <a:rPr b="0" lang="fr-FR" sz="4400" spc="-1" strike="noStrike">
+                <a:solidFill>
+                  <a:srgbClr val="000000"/>
+                </a:solidFill>
+                <a:latin typeface="Arial"/>
+              </a:rPr>
+              <a:t>d</a:t>
+            </a:r>
+            <a:r>
+              <a:rPr b="0" lang="fr-FR" sz="4400" spc="-1" strike="noStrike">
+                <a:solidFill>
+                  <a:srgbClr val="000000"/>
+                </a:solidFill>
+                <a:latin typeface="Arial"/>
+              </a:rPr>
+              <a:t>é</a:t>
+            </a:r>
+            <a:r>
+              <a:rPr b="0" lang="fr-FR" sz="4400" spc="-1" strike="noStrike">
+                <a:solidFill>
+                  <a:srgbClr val="000000"/>
+                </a:solidFill>
+                <a:latin typeface="Arial"/>
+              </a:rPr>
+              <a:t>p</a:t>
+            </a:r>
+            <a:r>
+              <a:rPr b="0" lang="fr-FR" sz="4400" spc="-1" strike="noStrike">
+                <a:solidFill>
+                  <a:srgbClr val="000000"/>
+                </a:solidFill>
+                <a:latin typeface="Arial"/>
+              </a:rPr>
+              <a:t>l</a:t>
+            </a:r>
+            <a:r>
+              <a:rPr b="0" lang="fr-FR" sz="4400" spc="-1" strike="noStrike">
+                <a:solidFill>
+                  <a:srgbClr val="000000"/>
+                </a:solidFill>
+                <a:latin typeface="Arial"/>
+              </a:rPr>
+              <a:t>a</a:t>
+            </a:r>
+            <a:r>
+              <a:rPr b="0" lang="fr-FR" sz="4400" spc="-1" strike="noStrike">
+                <a:solidFill>
+                  <a:srgbClr val="000000"/>
+                </a:solidFill>
+                <a:latin typeface="Arial"/>
+              </a:rPr>
+              <a:t>c</a:t>
+            </a:r>
+            <a:r>
+              <a:rPr b="0" lang="fr-FR" sz="4400" spc="-1" strike="noStrike">
+                <a:solidFill>
+                  <a:srgbClr val="000000"/>
+                </a:solidFill>
+                <a:latin typeface="Arial"/>
+              </a:rPr>
+              <a:t>e</a:t>
+            </a:r>
+            <a:r>
+              <a:rPr b="0" lang="fr-FR" sz="4400" spc="-1" strike="noStrike">
+                <a:solidFill>
+                  <a:srgbClr val="000000"/>
+                </a:solidFill>
+                <a:latin typeface="Arial"/>
+              </a:rPr>
+              <a:t>r </a:t>
+            </a:r>
+            <a:r>
+              <a:rPr b="0" lang="fr-FR" sz="4400" spc="-1" strike="noStrike">
+                <a:solidFill>
+                  <a:srgbClr val="000000"/>
+                </a:solidFill>
+                <a:latin typeface="Arial"/>
+              </a:rPr>
+              <a:t>l</a:t>
+            </a:r>
+            <a:r>
+              <a:rPr b="0" lang="fr-FR" sz="4400" spc="-1" strike="noStrike">
+                <a:solidFill>
+                  <a:srgbClr val="000000"/>
+                </a:solidFill>
+                <a:latin typeface="Arial"/>
+              </a:rPr>
+              <a:t>a </a:t>
+            </a:r>
+            <a:r>
+              <a:rPr b="0" lang="fr-FR" sz="4400" spc="-1" strike="noStrike">
+                <a:solidFill>
+                  <a:srgbClr val="000000"/>
+                </a:solidFill>
+                <a:latin typeface="Arial"/>
+              </a:rPr>
+              <a:t>d</a:t>
+            </a:r>
+            <a:r>
+              <a:rPr b="0" lang="fr-FR" sz="4400" spc="-1" strike="noStrike">
+                <a:solidFill>
+                  <a:srgbClr val="000000"/>
+                </a:solidFill>
+                <a:latin typeface="Arial"/>
+              </a:rPr>
+              <a:t>i</a:t>
+            </a:r>
+            <a:r>
+              <a:rPr b="0" lang="fr-FR" sz="4400" spc="-1" strike="noStrike">
+                <a:solidFill>
+                  <a:srgbClr val="000000"/>
+                </a:solidFill>
+                <a:latin typeface="Arial"/>
+              </a:rPr>
+              <a:t>a</a:t>
+            </a:r>
+            <a:r>
+              <a:rPr b="0" lang="fr-FR" sz="4400" spc="-1" strike="noStrike">
+                <a:solidFill>
+                  <a:srgbClr val="000000"/>
+                </a:solidFill>
+                <a:latin typeface="Arial"/>
+              </a:rPr>
+              <a:t>p</a:t>
+            </a:r>
+            <a:r>
+              <a:rPr b="0" lang="fr-FR" sz="4400" spc="-1" strike="noStrike">
+                <a:solidFill>
+                  <a:srgbClr val="000000"/>
+                </a:solidFill>
+                <a:latin typeface="Arial"/>
+              </a:rPr>
+              <a:t>o</a:t>
+            </a:r>
+            <a:endParaRPr b="0" lang="fr-FR" sz="4400" spc="-1" strike="noStrike">
+              <a:solidFill>
+                <a:srgbClr val="000000"/>
+              </a:solidFill>
+              <a:latin typeface="Arial"/>
             </a:endParaRPr>
           </a:p>
         </p:txBody>
@@ -349,7 +566,7 @@
             <a:pPr indent="0" algn="r">
               <a:buNone/>
             </a:pPr>
-            <a:fld id="{7A6F61ED-43B7-437C-A3A8-3F8FA66A05D2}" type="slidenum">
+            <a:fld id="{5C5D5741-3C2A-48E5-A75F-A13E29B0232B}" type="slidenum">
               <a:rPr b="0" lang="fr-FR" sz="1400" spc="-1" strike="noStrike">
                 <a:solidFill>
                   <a:srgbClr val="000000"/>
@@ -403,7 +620,7 @@
         <p:spPr>
           <a:xfrm>
             <a:off x="685800" y="1143000"/>
-            <a:ext cx="5486040" cy="3085920"/>
+            <a:ext cx="5485680" cy="3085560"/>
           </a:xfrm>
           <a:prstGeom prst="rect">
             <a:avLst/>
@@ -426,7 +643,7 @@
         <p:spPr>
           <a:xfrm>
             <a:off x="685800" y="4400640"/>
-            <a:ext cx="5486040" cy="3600000"/>
+            <a:ext cx="5485680" cy="3599640"/>
           </a:xfrm>
           <a:prstGeom prst="rect">
             <a:avLst/>
@@ -466,7 +683,7 @@
         <p:spPr>
           <a:xfrm>
             <a:off x="3884760" y="8685360"/>
-            <a:ext cx="2971440" cy="458280"/>
+            <a:ext cx="2971080" cy="457920"/>
           </a:xfrm>
           <a:prstGeom prst="rect">
             <a:avLst/>
@@ -486,6 +703,9 @@
                 <a:spcPct val="100000"/>
               </a:lnSpc>
               <a:buNone/>
+              <a:tabLst>
+                <a:tab algn="l" pos="0"/>
+              </a:tabLst>
               <a:defRPr b="0" lang="en-US" sz="1200" spc="-1" strike="noStrike">
                 <a:solidFill>
                   <a:schemeClr val="dk1"/>
@@ -501,8 +721,11 @@
                 <a:spcPct val="100000"/>
               </a:lnSpc>
               <a:buNone/>
-            </a:pPr>
-            <a:fld id="{D0F9239F-C17C-46B4-882D-909ECFA5EE02}" type="slidenum">
+              <a:tabLst>
+                <a:tab algn="l" pos="0"/>
+              </a:tabLst>
+            </a:pPr>
+            <a:fld id="{4E1DFE40-1B36-4B31-BAC3-40C1BAB6358D}" type="slidenum">
               <a:rPr b="0" lang="en-US" sz="1200" spc="-1" strike="noStrike">
                 <a:solidFill>
                   <a:schemeClr val="dk1"/>
@@ -556,7 +779,7 @@
         <p:spPr>
           <a:xfrm>
             <a:off x="685800" y="1143000"/>
-            <a:ext cx="5486040" cy="3085920"/>
+            <a:ext cx="5485680" cy="3085560"/>
           </a:xfrm>
           <a:prstGeom prst="rect">
             <a:avLst/>
@@ -579,7 +802,7 @@
         <p:spPr>
           <a:xfrm>
             <a:off x="685800" y="4400640"/>
-            <a:ext cx="5486040" cy="3600000"/>
+            <a:ext cx="5485680" cy="3599640"/>
           </a:xfrm>
           <a:prstGeom prst="rect">
             <a:avLst/>
@@ -619,7 +842,7 @@
         <p:spPr>
           <a:xfrm>
             <a:off x="3884760" y="8685360"/>
-            <a:ext cx="2971440" cy="458280"/>
+            <a:ext cx="2971080" cy="457920"/>
           </a:xfrm>
           <a:prstGeom prst="rect">
             <a:avLst/>
@@ -639,6 +862,9 @@
                 <a:spcPct val="100000"/>
               </a:lnSpc>
               <a:buNone/>
+              <a:tabLst>
+                <a:tab algn="l" pos="0"/>
+              </a:tabLst>
               <a:defRPr b="0" lang="en-US" sz="1200" spc="-1" strike="noStrike">
                 <a:solidFill>
                   <a:schemeClr val="dk1"/>
@@ -654,8 +880,11 @@
                 <a:spcPct val="100000"/>
               </a:lnSpc>
               <a:buNone/>
-            </a:pPr>
-            <a:fld id="{C789DA20-A94E-4414-B2A9-A224FC8051DD}" type="slidenum">
+              <a:tabLst>
+                <a:tab algn="l" pos="0"/>
+              </a:tabLst>
+            </a:pPr>
+            <a:fld id="{D199CD5C-F476-4B4C-ACE9-9DA85E34DB94}" type="slidenum">
               <a:rPr b="0" lang="en-US" sz="1200" spc="-1" strike="noStrike">
                 <a:solidFill>
                   <a:schemeClr val="dk1"/>
@@ -709,7 +938,7 @@
         <p:spPr>
           <a:xfrm>
             <a:off x="685800" y="1143000"/>
-            <a:ext cx="5486040" cy="3085920"/>
+            <a:ext cx="5485680" cy="3085560"/>
           </a:xfrm>
           <a:prstGeom prst="rect">
             <a:avLst/>
@@ -732,7 +961,7 @@
         <p:spPr>
           <a:xfrm>
             <a:off x="685800" y="4400640"/>
-            <a:ext cx="5486040" cy="3600000"/>
+            <a:ext cx="5485680" cy="3599640"/>
           </a:xfrm>
           <a:prstGeom prst="rect">
             <a:avLst/>
@@ -772,7 +1001,7 @@
         <p:spPr>
           <a:xfrm>
             <a:off x="3884760" y="8685360"/>
-            <a:ext cx="2971440" cy="458280"/>
+            <a:ext cx="2971080" cy="457920"/>
           </a:xfrm>
           <a:prstGeom prst="rect">
             <a:avLst/>
@@ -792,6 +1021,9 @@
                 <a:spcPct val="100000"/>
               </a:lnSpc>
               <a:buNone/>
+              <a:tabLst>
+                <a:tab algn="l" pos="0"/>
+              </a:tabLst>
               <a:defRPr b="0" lang="en-US" sz="1200" spc="-1" strike="noStrike">
                 <a:solidFill>
                   <a:schemeClr val="dk1"/>
@@ -807,8 +1039,11 @@
                 <a:spcPct val="100000"/>
               </a:lnSpc>
               <a:buNone/>
-            </a:pPr>
-            <a:fld id="{3FB03223-0FB5-4FAC-900C-1AD439BA0A5C}" type="slidenum">
+              <a:tabLst>
+                <a:tab algn="l" pos="0"/>
+              </a:tabLst>
+            </a:pPr>
+            <a:fld id="{D9B39161-0FB0-4DE8-BB39-64C7EA7B394C}" type="slidenum">
               <a:rPr b="0" lang="en-US" sz="1200" spc="-1" strike="noStrike">
                 <a:solidFill>
                   <a:schemeClr val="dk1"/>
@@ -862,7 +1097,7 @@
         <p:spPr>
           <a:xfrm>
             <a:off x="685800" y="1143000"/>
-            <a:ext cx="5486040" cy="3085920"/>
+            <a:ext cx="5485680" cy="3085560"/>
           </a:xfrm>
           <a:prstGeom prst="rect">
             <a:avLst/>
@@ -885,7 +1120,7 @@
         <p:spPr>
           <a:xfrm>
             <a:off x="685800" y="4400640"/>
-            <a:ext cx="5486040" cy="3600000"/>
+            <a:ext cx="5485680" cy="3599640"/>
           </a:xfrm>
           <a:prstGeom prst="rect">
             <a:avLst/>
@@ -925,7 +1160,7 @@
         <p:spPr>
           <a:xfrm>
             <a:off x="3884760" y="8685360"/>
-            <a:ext cx="2971440" cy="458280"/>
+            <a:ext cx="2971080" cy="457920"/>
           </a:xfrm>
           <a:prstGeom prst="rect">
             <a:avLst/>
@@ -945,6 +1180,9 @@
                 <a:spcPct val="100000"/>
               </a:lnSpc>
               <a:buNone/>
+              <a:tabLst>
+                <a:tab algn="l" pos="0"/>
+              </a:tabLst>
               <a:defRPr b="0" lang="en-US" sz="1200" spc="-1" strike="noStrike">
                 <a:solidFill>
                   <a:schemeClr val="dk1"/>
@@ -960,8 +1198,11 @@
                 <a:spcPct val="100000"/>
               </a:lnSpc>
               <a:buNone/>
-            </a:pPr>
-            <a:fld id="{65153254-D506-43B1-A445-ED9AA640F1C4}" type="slidenum">
+              <a:tabLst>
+                <a:tab algn="l" pos="0"/>
+              </a:tabLst>
+            </a:pPr>
+            <a:fld id="{DB75D692-92FE-4014-AB97-51D1AEEFA500}" type="slidenum">
               <a:rPr b="0" lang="en-US" sz="1200" spc="-1" strike="noStrike">
                 <a:solidFill>
                   <a:schemeClr val="dk1"/>
@@ -1015,7 +1256,7 @@
         <p:spPr>
           <a:xfrm>
             <a:off x="685800" y="1143000"/>
-            <a:ext cx="5486040" cy="3085920"/>
+            <a:ext cx="5485680" cy="3085560"/>
           </a:xfrm>
           <a:prstGeom prst="rect">
             <a:avLst/>
@@ -1038,7 +1279,7 @@
         <p:spPr>
           <a:xfrm>
             <a:off x="685800" y="4400640"/>
-            <a:ext cx="5486040" cy="3600000"/>
+            <a:ext cx="5485680" cy="3599640"/>
           </a:xfrm>
           <a:prstGeom prst="rect">
             <a:avLst/>
@@ -1078,7 +1319,7 @@
         <p:spPr>
           <a:xfrm>
             <a:off x="3884760" y="8685360"/>
-            <a:ext cx="2971440" cy="458280"/>
+            <a:ext cx="2971080" cy="457920"/>
           </a:xfrm>
           <a:prstGeom prst="rect">
             <a:avLst/>
@@ -1098,6 +1339,9 @@
                 <a:spcPct val="100000"/>
               </a:lnSpc>
               <a:buNone/>
+              <a:tabLst>
+                <a:tab algn="l" pos="0"/>
+              </a:tabLst>
               <a:defRPr b="0" lang="en-US" sz="1200" spc="-1" strike="noStrike">
                 <a:solidFill>
                   <a:schemeClr val="dk1"/>
@@ -1113,8 +1357,11 @@
                 <a:spcPct val="100000"/>
               </a:lnSpc>
               <a:buNone/>
-            </a:pPr>
-            <a:fld id="{67496CBF-2CAF-4AA1-BD5C-AE8251FC15D5}" type="slidenum">
+              <a:tabLst>
+                <a:tab algn="l" pos="0"/>
+              </a:tabLst>
+            </a:pPr>
+            <a:fld id="{325D645C-1573-498B-8AF6-AB741C3DAF5A}" type="slidenum">
               <a:rPr b="0" lang="en-US" sz="1200" spc="-1" strike="noStrike">
                 <a:solidFill>
                   <a:schemeClr val="dk1"/>
@@ -1168,7 +1415,7 @@
         <p:spPr>
           <a:xfrm>
             <a:off x="685800" y="1143000"/>
-            <a:ext cx="5486040" cy="3085920"/>
+            <a:ext cx="5485680" cy="3085560"/>
           </a:xfrm>
           <a:prstGeom prst="rect">
             <a:avLst/>
@@ -1191,7 +1438,7 @@
         <p:spPr>
           <a:xfrm>
             <a:off x="685800" y="4400640"/>
-            <a:ext cx="5486040" cy="3600000"/>
+            <a:ext cx="5485680" cy="3599640"/>
           </a:xfrm>
           <a:prstGeom prst="rect">
             <a:avLst/>
@@ -1231,7 +1478,7 @@
         <p:spPr>
           <a:xfrm>
             <a:off x="3884760" y="8685360"/>
-            <a:ext cx="2971440" cy="458280"/>
+            <a:ext cx="2971080" cy="457920"/>
           </a:xfrm>
           <a:prstGeom prst="rect">
             <a:avLst/>
@@ -1251,6 +1498,9 @@
                 <a:spcPct val="100000"/>
               </a:lnSpc>
               <a:buNone/>
+              <a:tabLst>
+                <a:tab algn="l" pos="0"/>
+              </a:tabLst>
               <a:defRPr b="0" lang="en-US" sz="1200" spc="-1" strike="noStrike">
                 <a:solidFill>
                   <a:schemeClr val="dk1"/>
@@ -1266,8 +1516,11 @@
                 <a:spcPct val="100000"/>
               </a:lnSpc>
               <a:buNone/>
-            </a:pPr>
-            <a:fld id="{41E458AD-E099-40FE-A358-1B0D580F8506}" type="slidenum">
+              <a:tabLst>
+                <a:tab algn="l" pos="0"/>
+              </a:tabLst>
+            </a:pPr>
+            <a:fld id="{5D1D4132-0D08-4D70-A7B4-D71CC62FE2A8}" type="slidenum">
               <a:rPr b="0" lang="en-US" sz="1200" spc="-1" strike="noStrike">
                 <a:solidFill>
                   <a:schemeClr val="dk1"/>
@@ -1321,7 +1574,7 @@
         <p:spPr>
           <a:xfrm>
             <a:off x="685800" y="1143000"/>
-            <a:ext cx="5486040" cy="3085920"/>
+            <a:ext cx="5485680" cy="3085560"/>
           </a:xfrm>
           <a:prstGeom prst="rect">
             <a:avLst/>
@@ -1344,7 +1597,7 @@
         <p:spPr>
           <a:xfrm>
             <a:off x="685800" y="4400640"/>
-            <a:ext cx="5486040" cy="3600000"/>
+            <a:ext cx="5485680" cy="3599640"/>
           </a:xfrm>
           <a:prstGeom prst="rect">
             <a:avLst/>
@@ -1384,7 +1637,7 @@
         <p:spPr>
           <a:xfrm>
             <a:off x="3884760" y="8685360"/>
-            <a:ext cx="2971440" cy="458280"/>
+            <a:ext cx="2971080" cy="457920"/>
           </a:xfrm>
           <a:prstGeom prst="rect">
             <a:avLst/>
@@ -1404,6 +1657,9 @@
                 <a:spcPct val="100000"/>
               </a:lnSpc>
               <a:buNone/>
+              <a:tabLst>
+                <a:tab algn="l" pos="0"/>
+              </a:tabLst>
               <a:defRPr b="0" lang="en-US" sz="1200" spc="-1" strike="noStrike">
                 <a:solidFill>
                   <a:schemeClr val="dk1"/>
@@ -1419,8 +1675,11 @@
                 <a:spcPct val="100000"/>
               </a:lnSpc>
               <a:buNone/>
-            </a:pPr>
-            <a:fld id="{8B866641-13E8-4263-9DA7-AE10380EE969}" type="slidenum">
+              <a:tabLst>
+                <a:tab algn="l" pos="0"/>
+              </a:tabLst>
+            </a:pPr>
+            <a:fld id="{CCEB83EA-0E57-4370-8462-90CEBAEFFE37}" type="slidenum">
               <a:rPr b="0" lang="en-US" sz="1200" spc="-1" strike="noStrike">
                 <a:solidFill>
                   <a:schemeClr val="dk1"/>
@@ -1474,7 +1733,7 @@
         <p:spPr>
           <a:xfrm>
             <a:off x="685800" y="1143000"/>
-            <a:ext cx="5486040" cy="3085920"/>
+            <a:ext cx="5485680" cy="3085560"/>
           </a:xfrm>
           <a:prstGeom prst="rect">
             <a:avLst/>
@@ -1497,7 +1756,7 @@
         <p:spPr>
           <a:xfrm>
             <a:off x="685800" y="4400640"/>
-            <a:ext cx="5486040" cy="3600000"/>
+            <a:ext cx="5485680" cy="3599640"/>
           </a:xfrm>
           <a:prstGeom prst="rect">
             <a:avLst/>
@@ -1537,7 +1796,7 @@
         <p:spPr>
           <a:xfrm>
             <a:off x="3884760" y="8685360"/>
-            <a:ext cx="2971440" cy="458280"/>
+            <a:ext cx="2971080" cy="457920"/>
           </a:xfrm>
           <a:prstGeom prst="rect">
             <a:avLst/>
@@ -1557,6 +1816,9 @@
                 <a:spcPct val="100000"/>
               </a:lnSpc>
               <a:buNone/>
+              <a:tabLst>
+                <a:tab algn="l" pos="0"/>
+              </a:tabLst>
               <a:defRPr b="0" lang="en-US" sz="1200" spc="-1" strike="noStrike">
                 <a:solidFill>
                   <a:schemeClr val="dk1"/>
@@ -1572,8 +1834,11 @@
                 <a:spcPct val="100000"/>
               </a:lnSpc>
               <a:buNone/>
-            </a:pPr>
-            <a:fld id="{9B029E0B-EDFA-4AE6-929F-B2EA382BC50E}" type="slidenum">
+              <a:tabLst>
+                <a:tab algn="l" pos="0"/>
+              </a:tabLst>
+            </a:pPr>
+            <a:fld id="{960F5A64-0E3A-4953-82D4-31005FADC678}" type="slidenum">
               <a:rPr b="0" lang="en-US" sz="1200" spc="-1" strike="noStrike">
                 <a:solidFill>
                   <a:schemeClr val="dk1"/>
@@ -1627,7 +1892,7 @@
         <p:spPr>
           <a:xfrm>
             <a:off x="685800" y="1143000"/>
-            <a:ext cx="5486040" cy="3085920"/>
+            <a:ext cx="5485680" cy="3085560"/>
           </a:xfrm>
           <a:prstGeom prst="rect">
             <a:avLst/>
@@ -1650,7 +1915,7 @@
         <p:spPr>
           <a:xfrm>
             <a:off x="685800" y="4400640"/>
-            <a:ext cx="5486040" cy="3600000"/>
+            <a:ext cx="5485680" cy="3599640"/>
           </a:xfrm>
           <a:prstGeom prst="rect">
             <a:avLst/>
@@ -1690,7 +1955,7 @@
         <p:spPr>
           <a:xfrm>
             <a:off x="3884760" y="8685360"/>
-            <a:ext cx="2971440" cy="458280"/>
+            <a:ext cx="2971080" cy="457920"/>
           </a:xfrm>
           <a:prstGeom prst="rect">
             <a:avLst/>
@@ -1710,6 +1975,9 @@
                 <a:spcPct val="100000"/>
               </a:lnSpc>
               <a:buNone/>
+              <a:tabLst>
+                <a:tab algn="l" pos="0"/>
+              </a:tabLst>
               <a:defRPr b="0" lang="en-US" sz="1200" spc="-1" strike="noStrike">
                 <a:solidFill>
                   <a:schemeClr val="dk1"/>
@@ -1725,8 +1993,11 @@
                 <a:spcPct val="100000"/>
               </a:lnSpc>
               <a:buNone/>
-            </a:pPr>
-            <a:fld id="{558A986E-7EA5-4CE2-965A-C32BB1064CE2}" type="slidenum">
+              <a:tabLst>
+                <a:tab algn="l" pos="0"/>
+              </a:tabLst>
+            </a:pPr>
+            <a:fld id="{EE7E3663-BB4B-4881-B79B-E35A20B6B06B}" type="slidenum">
               <a:rPr b="0" lang="en-US" sz="1200" spc="-1" strike="noStrike">
                 <a:solidFill>
                   <a:schemeClr val="dk1"/>
@@ -1780,7 +2051,7 @@
         <p:spPr>
           <a:xfrm>
             <a:off x="685800" y="1143000"/>
-            <a:ext cx="5486040" cy="3085920"/>
+            <a:ext cx="5485680" cy="3085560"/>
           </a:xfrm>
           <a:prstGeom prst="rect">
             <a:avLst/>
@@ -1803,7 +2074,7 @@
         <p:spPr>
           <a:xfrm>
             <a:off x="685800" y="4400640"/>
-            <a:ext cx="5486040" cy="3600000"/>
+            <a:ext cx="5485680" cy="3599640"/>
           </a:xfrm>
           <a:prstGeom prst="rect">
             <a:avLst/>
@@ -1843,7 +2114,7 @@
         <p:spPr>
           <a:xfrm>
             <a:off x="3884760" y="8685360"/>
-            <a:ext cx="2971440" cy="458280"/>
+            <a:ext cx="2971080" cy="457920"/>
           </a:xfrm>
           <a:prstGeom prst="rect">
             <a:avLst/>
@@ -1863,6 +2134,9 @@
                 <a:spcPct val="100000"/>
               </a:lnSpc>
               <a:buNone/>
+              <a:tabLst>
+                <a:tab algn="l" pos="0"/>
+              </a:tabLst>
               <a:defRPr b="0" lang="en-US" sz="1200" spc="-1" strike="noStrike">
                 <a:solidFill>
                   <a:schemeClr val="dk1"/>
@@ -1878,8 +2152,11 @@
                 <a:spcPct val="100000"/>
               </a:lnSpc>
               <a:buNone/>
-            </a:pPr>
-            <a:fld id="{E9EED91A-8F85-4BFA-939F-3BC2BE9B1B6B}" type="slidenum">
+              <a:tabLst>
+                <a:tab algn="l" pos="0"/>
+              </a:tabLst>
+            </a:pPr>
+            <a:fld id="{27E65644-32EF-475F-91E1-05B03EDBB9A1}" type="slidenum">
               <a:rPr b="0" lang="en-US" sz="1200" spc="-1" strike="noStrike">
                 <a:solidFill>
                   <a:schemeClr val="dk1"/>
@@ -1933,7 +2210,7 @@
         <p:spPr>
           <a:xfrm>
             <a:off x="685800" y="1143000"/>
-            <a:ext cx="5486040" cy="3085920"/>
+            <a:ext cx="5485680" cy="3085560"/>
           </a:xfrm>
           <a:prstGeom prst="rect">
             <a:avLst/>
@@ -1956,7 +2233,7 @@
         <p:spPr>
           <a:xfrm>
             <a:off x="685800" y="4400640"/>
-            <a:ext cx="5486040" cy="3600000"/>
+            <a:ext cx="5485680" cy="3599640"/>
           </a:xfrm>
           <a:prstGeom prst="rect">
             <a:avLst/>
@@ -1996,7 +2273,7 @@
         <p:spPr>
           <a:xfrm>
             <a:off x="3884760" y="8685360"/>
-            <a:ext cx="2971440" cy="458280"/>
+            <a:ext cx="2971080" cy="457920"/>
           </a:xfrm>
           <a:prstGeom prst="rect">
             <a:avLst/>
@@ -2016,6 +2293,9 @@
                 <a:spcPct val="100000"/>
               </a:lnSpc>
               <a:buNone/>
+              <a:tabLst>
+                <a:tab algn="l" pos="0"/>
+              </a:tabLst>
               <a:defRPr b="0" lang="en-US" sz="1200" spc="-1" strike="noStrike">
                 <a:solidFill>
                   <a:schemeClr val="dk1"/>
@@ -2031,8 +2311,11 @@
                 <a:spcPct val="100000"/>
               </a:lnSpc>
               <a:buNone/>
-            </a:pPr>
-            <a:fld id="{A6FB432E-EEC4-4321-93B5-CCE80C018781}" type="slidenum">
+              <a:tabLst>
+                <a:tab algn="l" pos="0"/>
+              </a:tabLst>
+            </a:pPr>
+            <a:fld id="{D943218B-2FC4-47B0-B838-95B519247698}" type="slidenum">
               <a:rPr b="0" lang="en-US" sz="1200" spc="-1" strike="noStrike">
                 <a:solidFill>
                   <a:schemeClr val="dk1"/>
@@ -2086,7 +2369,7 @@
         <p:spPr>
           <a:xfrm>
             <a:off x="685800" y="1143000"/>
-            <a:ext cx="5486040" cy="3085920"/>
+            <a:ext cx="5485680" cy="3085560"/>
           </a:xfrm>
           <a:prstGeom prst="rect">
             <a:avLst/>
@@ -2109,7 +2392,7 @@
         <p:spPr>
           <a:xfrm>
             <a:off x="685800" y="4400640"/>
-            <a:ext cx="5486040" cy="3600000"/>
+            <a:ext cx="5485680" cy="3599640"/>
           </a:xfrm>
           <a:prstGeom prst="rect">
             <a:avLst/>
@@ -2149,7 +2432,7 @@
         <p:spPr>
           <a:xfrm>
             <a:off x="3884760" y="8685360"/>
-            <a:ext cx="2971440" cy="458280"/>
+            <a:ext cx="2971080" cy="457920"/>
           </a:xfrm>
           <a:prstGeom prst="rect">
             <a:avLst/>
@@ -2169,6 +2452,9 @@
                 <a:spcPct val="100000"/>
               </a:lnSpc>
               <a:buNone/>
+              <a:tabLst>
+                <a:tab algn="l" pos="0"/>
+              </a:tabLst>
               <a:defRPr b="0" lang="en-US" sz="1200" spc="-1" strike="noStrike">
                 <a:solidFill>
                   <a:schemeClr val="dk1"/>
@@ -2184,8 +2470,11 @@
                 <a:spcPct val="100000"/>
               </a:lnSpc>
               <a:buNone/>
-            </a:pPr>
-            <a:fld id="{7DD2FBFE-BC00-4D5B-8ECC-D441610DE414}" type="slidenum">
+              <a:tabLst>
+                <a:tab algn="l" pos="0"/>
+              </a:tabLst>
+            </a:pPr>
+            <a:fld id="{E579E914-09CB-4EA7-BF59-F5023FF57658}" type="slidenum">
               <a:rPr b="0" lang="en-US" sz="1200" spc="-1" strike="noStrike">
                 <a:solidFill>
                   <a:schemeClr val="dk1"/>
@@ -2283,23 +2572,32 @@
             <a:noAutofit/>
           </a:bodyPr>
           <a:p>
-            <a:pPr indent="0">
+            <a:pPr indent="0" algn="ctr">
               <a:buNone/>
             </a:pPr>
             <a:r>
-              <a:rPr b="0" lang="fr-FR" sz="1800" spc="-1" strike="noStrike">
-                <a:solidFill>
-                  <a:schemeClr val="dk1"/>
-                </a:solidFill>
-                <a:latin typeface="Calibri"/>
-              </a:rPr>
-              <a:t>Cliquez pour éditer le format du texte-titre</a:t>
-            </a:r>
-            <a:endParaRPr b="0" lang="fr-FR" sz="1800" spc="-1" strike="noStrike">
-              <a:solidFill>
-                <a:schemeClr val="dk1"/>
-              </a:solidFill>
-              <a:latin typeface="Calibri"/>
+              <a:rPr b="0" lang="fr-FR" sz="4400" spc="-1" strike="noStrike">
+                <a:solidFill>
+                  <a:srgbClr val="000000"/>
+                </a:solidFill>
+                <a:latin typeface="Arial"/>
+              </a:rPr>
+              <a:t>Cliquez pour éditer le format </a:t>
+            </a:r>
+            <a:r>
+              <a:rPr b="0" lang="fr-FR" sz="4400" spc="-1" strike="noStrike">
+                <a:solidFill>
+                  <a:srgbClr val="000000"/>
+                </a:solidFill>
+                <a:latin typeface="Arial"/>
+              </a:rPr>
+              <a:t>du texte-titre</a:t>
+            </a:r>
+            <a:endParaRPr b="0" lang="fr-FR" sz="4400" spc="-1" strike="noStrike">
+              <a:solidFill>
+                <a:srgbClr val="000000"/>
+              </a:solidFill>
+              <a:latin typeface="Arial"/>
             </a:endParaRPr>
           </a:p>
         </p:txBody>
@@ -2329,7 +2627,7 @@
         </p:spPr>
         <p:txBody>
           <a:bodyPr lIns="0" rIns="0" tIns="0" bIns="0" anchor="t">
-            <a:normAutofit fontScale="89053"/>
+            <a:normAutofit fontScale="96865" lnSpcReduction="10000"/>
           </a:bodyPr>
           <a:p>
             <a:pPr marL="432000" indent="-324000">
@@ -2346,17 +2644,17 @@
             <a:r>
               <a:rPr b="0" lang="fr-FR" sz="3200" spc="-1" strike="noStrike">
                 <a:solidFill>
-                  <a:schemeClr val="dk1"/>
-                </a:solidFill>
-                <a:latin typeface="Calibri"/>
+                  <a:srgbClr val="000000"/>
+                </a:solidFill>
+                <a:latin typeface="Arial"/>
               </a:rPr>
               <a:t>Cliquez pour éditer le format du plan de texte</a:t>
             </a:r>
             <a:endParaRPr b="0" lang="fr-FR" sz="3200" spc="-1" strike="noStrike">
               <a:solidFill>
-                <a:schemeClr val="dk1"/>
-              </a:solidFill>
-              <a:latin typeface="Calibri"/>
+                <a:srgbClr val="000000"/>
+              </a:solidFill>
+              <a:latin typeface="Arial"/>
             </a:endParaRPr>
           </a:p>
           <a:p>
@@ -2372,19 +2670,19 @@
               <a:buChar char=""/>
             </a:pPr>
             <a:r>
-              <a:rPr b="0" lang="fr-FR" sz="2400" spc="-1" strike="noStrike">
-                <a:solidFill>
-                  <a:schemeClr val="dk1"/>
-                </a:solidFill>
-                <a:latin typeface="Calibri"/>
+              <a:rPr b="0" lang="fr-FR" sz="2800" spc="-1" strike="noStrike">
+                <a:solidFill>
+                  <a:srgbClr val="000000"/>
+                </a:solidFill>
+                <a:latin typeface="Arial"/>
               </a:rPr>
               <a:t>Second niveau de plan</a:t>
             </a:r>
-            <a:endParaRPr b="0" lang="fr-FR" sz="2400" spc="-1" strike="noStrike">
-              <a:solidFill>
-                <a:schemeClr val="dk1"/>
-              </a:solidFill>
-              <a:latin typeface="Calibri"/>
+            <a:endParaRPr b="0" lang="fr-FR" sz="2800" spc="-1" strike="noStrike">
+              <a:solidFill>
+                <a:srgbClr val="000000"/>
+              </a:solidFill>
+              <a:latin typeface="Arial"/>
             </a:endParaRPr>
           </a:p>
           <a:p>
@@ -2400,19 +2698,19 @@
               <a:buChar char=""/>
             </a:pPr>
             <a:r>
-              <a:rPr b="0" lang="fr-FR" sz="2000" spc="-1" strike="noStrike">
-                <a:solidFill>
-                  <a:schemeClr val="dk1"/>
-                </a:solidFill>
-                <a:latin typeface="Calibri"/>
+              <a:rPr b="0" lang="fr-FR" sz="2400" spc="-1" strike="noStrike">
+                <a:solidFill>
+                  <a:srgbClr val="000000"/>
+                </a:solidFill>
+                <a:latin typeface="Arial"/>
               </a:rPr>
               <a:t>Troisième niveau de plan</a:t>
             </a:r>
-            <a:endParaRPr b="0" lang="fr-FR" sz="2000" spc="-1" strike="noStrike">
-              <a:solidFill>
-                <a:schemeClr val="dk1"/>
-              </a:solidFill>
-              <a:latin typeface="Calibri"/>
+            <a:endParaRPr b="0" lang="fr-FR" sz="2400" spc="-1" strike="noStrike">
+              <a:solidFill>
+                <a:srgbClr val="000000"/>
+              </a:solidFill>
+              <a:latin typeface="Arial"/>
             </a:endParaRPr>
           </a:p>
           <a:p>
@@ -2430,17 +2728,17 @@
             <a:r>
               <a:rPr b="0" lang="fr-FR" sz="2000" spc="-1" strike="noStrike">
                 <a:solidFill>
-                  <a:schemeClr val="dk1"/>
-                </a:solidFill>
-                <a:latin typeface="Calibri"/>
+                  <a:srgbClr val="000000"/>
+                </a:solidFill>
+                <a:latin typeface="Arial"/>
               </a:rPr>
               <a:t>Quatrième niveau de plan</a:t>
             </a:r>
             <a:endParaRPr b="0" lang="fr-FR" sz="2000" spc="-1" strike="noStrike">
               <a:solidFill>
-                <a:schemeClr val="dk1"/>
-              </a:solidFill>
-              <a:latin typeface="Calibri"/>
+                <a:srgbClr val="000000"/>
+              </a:solidFill>
+              <a:latin typeface="Arial"/>
             </a:endParaRPr>
           </a:p>
           <a:p>
@@ -2458,17 +2756,17 @@
             <a:r>
               <a:rPr b="0" lang="fr-FR" sz="2000" spc="-1" strike="noStrike">
                 <a:solidFill>
-                  <a:schemeClr val="dk1"/>
-                </a:solidFill>
-                <a:latin typeface="Calibri"/>
+                  <a:srgbClr val="000000"/>
+                </a:solidFill>
+                <a:latin typeface="Arial"/>
               </a:rPr>
               <a:t>Cinquième niveau de plan</a:t>
             </a:r>
             <a:endParaRPr b="0" lang="fr-FR" sz="2000" spc="-1" strike="noStrike">
               <a:solidFill>
-                <a:schemeClr val="dk1"/>
-              </a:solidFill>
-              <a:latin typeface="Calibri"/>
+                <a:srgbClr val="000000"/>
+              </a:solidFill>
+              <a:latin typeface="Arial"/>
             </a:endParaRPr>
           </a:p>
           <a:p>
@@ -2486,17 +2784,17 @@
             <a:r>
               <a:rPr b="0" lang="fr-FR" sz="2000" spc="-1" strike="noStrike">
                 <a:solidFill>
-                  <a:schemeClr val="dk1"/>
-                </a:solidFill>
-                <a:latin typeface="Calibri"/>
+                  <a:srgbClr val="000000"/>
+                </a:solidFill>
+                <a:latin typeface="Arial"/>
               </a:rPr>
               <a:t>Sixième niveau de plan</a:t>
             </a:r>
             <a:endParaRPr b="0" lang="fr-FR" sz="2000" spc="-1" strike="noStrike">
               <a:solidFill>
-                <a:schemeClr val="dk1"/>
-              </a:solidFill>
-              <a:latin typeface="Calibri"/>
+                <a:srgbClr val="000000"/>
+              </a:solidFill>
+              <a:latin typeface="Arial"/>
             </a:endParaRPr>
           </a:p>
           <a:p>
@@ -2514,17 +2812,17 @@
             <a:r>
               <a:rPr b="0" lang="fr-FR" sz="2000" spc="-1" strike="noStrike">
                 <a:solidFill>
-                  <a:schemeClr val="dk1"/>
-                </a:solidFill>
-                <a:latin typeface="Calibri"/>
+                  <a:srgbClr val="000000"/>
+                </a:solidFill>
+                <a:latin typeface="Arial"/>
               </a:rPr>
               <a:t>Septième niveau de plan</a:t>
             </a:r>
             <a:endParaRPr b="0" lang="fr-FR" sz="2000" spc="-1" strike="noStrike">
               <a:solidFill>
-                <a:schemeClr val="dk1"/>
-              </a:solidFill>
-              <a:latin typeface="Calibri"/>
+                <a:srgbClr val="000000"/>
+              </a:solidFill>
+              <a:latin typeface="Arial"/>
             </a:endParaRPr>
           </a:p>
         </p:txBody>
@@ -2571,7 +2869,7 @@
         <p:spPr>
           <a:xfrm>
             <a:off x="-914400" y="-914400"/>
-            <a:ext cx="3657240" cy="3657240"/>
+            <a:ext cx="3656880" cy="3656880"/>
           </a:xfrm>
           <a:prstGeom prst="ellipse">
             <a:avLst/>
@@ -2601,6 +2899,11 @@
             <a:noAutofit/>
           </a:bodyPr>
           <a:p>
+            <a:pPr>
+              <a:lnSpc>
+                <a:spcPct val="100000"/>
+              </a:lnSpc>
+            </a:pPr>
             <a:endParaRPr b="0" lang="fr-FR" sz="1800" spc="-1" strike="noStrike">
               <a:solidFill>
                 <a:srgbClr val="ffffff"/>
@@ -2619,7 +2922,7 @@
         <p:spPr>
           <a:xfrm>
             <a:off x="6858000" y="2743200"/>
-            <a:ext cx="3657240" cy="3657240"/>
+            <a:ext cx="3656880" cy="3656880"/>
           </a:xfrm>
           <a:prstGeom prst="ellipse">
             <a:avLst/>
@@ -2649,6 +2952,11 @@
             <a:noAutofit/>
           </a:bodyPr>
           <a:p>
+            <a:pPr>
+              <a:lnSpc>
+                <a:spcPct val="100000"/>
+              </a:lnSpc>
+            </a:pPr>
             <a:endParaRPr b="0" lang="fr-FR" sz="1800" spc="-1" strike="noStrike">
               <a:solidFill>
                 <a:srgbClr val="ffffff"/>
@@ -2667,7 +2975,7 @@
         <p:spPr>
           <a:xfrm>
             <a:off x="4572000" y="-457200"/>
-            <a:ext cx="1828440" cy="1828440"/>
+            <a:ext cx="1828080" cy="1828080"/>
           </a:xfrm>
           <a:prstGeom prst="ellipse">
             <a:avLst/>
@@ -2697,6 +3005,11 @@
             <a:noAutofit/>
           </a:bodyPr>
           <a:p>
+            <a:pPr>
+              <a:lnSpc>
+                <a:spcPct val="100000"/>
+              </a:lnSpc>
+            </a:pPr>
             <a:endParaRPr b="0" lang="fr-FR" sz="1800" spc="-1" strike="noStrike">
               <a:solidFill>
                 <a:srgbClr val="ffffff"/>
@@ -2715,7 +3028,7 @@
         <p:spPr>
           <a:xfrm>
             <a:off x="548640" y="457200"/>
-            <a:ext cx="1462680" cy="502560"/>
+            <a:ext cx="1462320" cy="502200"/>
           </a:xfrm>
           <a:prstGeom prst="roundRect">
             <a:avLst>
@@ -2743,6 +3056,11 @@
             <a:noAutofit/>
           </a:bodyPr>
           <a:p>
+            <a:pPr>
+              <a:lnSpc>
+                <a:spcPct val="100000"/>
+              </a:lnSpc>
+            </a:pPr>
             <a:endParaRPr b="0" lang="fr-FR" sz="1800" spc="-1" strike="noStrike">
               <a:solidFill>
                 <a:srgbClr val="ffffff"/>
@@ -2761,7 +3079,7 @@
         <p:spPr>
           <a:xfrm>
             <a:off x="548640" y="457200"/>
-            <a:ext cx="1462680" cy="502560"/>
+            <a:ext cx="1462320" cy="502200"/>
           </a:xfrm>
           <a:prstGeom prst="rect">
             <a:avLst/>
@@ -2817,7 +3135,7 @@
         <p:spPr>
           <a:xfrm>
             <a:off x="548640" y="1188720"/>
-            <a:ext cx="8046360" cy="548280"/>
+            <a:ext cx="8046000" cy="547920"/>
           </a:xfrm>
           <a:prstGeom prst="rect">
             <a:avLst/>
@@ -2873,7 +3191,7 @@
         <p:spPr>
           <a:xfrm>
             <a:off x="548640" y="1737360"/>
-            <a:ext cx="8046360" cy="1645560"/>
+            <a:ext cx="8046000" cy="1645200"/>
           </a:xfrm>
           <a:prstGeom prst="rect">
             <a:avLst/>
@@ -2954,7 +3272,7 @@
         <p:spPr>
           <a:xfrm>
             <a:off x="548640" y="3566160"/>
-            <a:ext cx="2651400" cy="411120"/>
+            <a:ext cx="2651040" cy="410760"/>
           </a:xfrm>
           <a:prstGeom prst="roundRect">
             <a:avLst>
@@ -2986,6 +3304,11 @@
             <a:noAutofit/>
           </a:bodyPr>
           <a:p>
+            <a:pPr>
+              <a:lnSpc>
+                <a:spcPct val="100000"/>
+              </a:lnSpc>
+            </a:pPr>
             <a:endParaRPr b="0" lang="fr-FR" sz="1800" spc="-1" strike="noStrike">
               <a:solidFill>
                 <a:srgbClr val="ffffff"/>
@@ -3004,7 +3327,7 @@
         <p:spPr>
           <a:xfrm>
             <a:off x="548640" y="3566160"/>
-            <a:ext cx="2651400" cy="411120"/>
+            <a:ext cx="2651040" cy="410760"/>
           </a:xfrm>
           <a:prstGeom prst="rect">
             <a:avLst/>
@@ -3060,7 +3383,7 @@
         <p:spPr>
           <a:xfrm>
             <a:off x="3429000" y="3566160"/>
-            <a:ext cx="2651400" cy="411120"/>
+            <a:ext cx="2651040" cy="410760"/>
           </a:xfrm>
           <a:prstGeom prst="roundRect">
             <a:avLst>
@@ -3092,6 +3415,11 @@
             <a:noAutofit/>
           </a:bodyPr>
           <a:p>
+            <a:pPr>
+              <a:lnSpc>
+                <a:spcPct val="100000"/>
+              </a:lnSpc>
+            </a:pPr>
             <a:endParaRPr b="0" lang="fr-FR" sz="1800" spc="-1" strike="noStrike">
               <a:solidFill>
                 <a:srgbClr val="ffffff"/>
@@ -3110,7 +3438,7 @@
         <p:spPr>
           <a:xfrm>
             <a:off x="3429000" y="3566160"/>
-            <a:ext cx="2651400" cy="411120"/>
+            <a:ext cx="2651040" cy="410760"/>
           </a:xfrm>
           <a:prstGeom prst="rect">
             <a:avLst/>
@@ -3166,7 +3494,7 @@
         <p:spPr>
           <a:xfrm>
             <a:off x="6309360" y="3566160"/>
-            <a:ext cx="2651400" cy="411120"/>
+            <a:ext cx="2651040" cy="410760"/>
           </a:xfrm>
           <a:prstGeom prst="roundRect">
             <a:avLst>
@@ -3198,6 +3526,11 @@
             <a:noAutofit/>
           </a:bodyPr>
           <a:p>
+            <a:pPr>
+              <a:lnSpc>
+                <a:spcPct val="100000"/>
+              </a:lnSpc>
+            </a:pPr>
             <a:endParaRPr b="0" lang="fr-FR" sz="1800" spc="-1" strike="noStrike">
               <a:solidFill>
                 <a:srgbClr val="ffffff"/>
@@ -3216,7 +3549,7 @@
         <p:spPr>
           <a:xfrm>
             <a:off x="6309360" y="3566160"/>
-            <a:ext cx="2651400" cy="411120"/>
+            <a:ext cx="2651040" cy="410760"/>
           </a:xfrm>
           <a:prstGeom prst="rect">
             <a:avLst/>
@@ -3272,7 +3605,7 @@
         <p:spPr>
           <a:xfrm>
             <a:off x="548640" y="4160520"/>
-            <a:ext cx="2651400" cy="411120"/>
+            <a:ext cx="2651040" cy="410760"/>
           </a:xfrm>
           <a:prstGeom prst="roundRect">
             <a:avLst>
@@ -3304,6 +3637,11 @@
             <a:noAutofit/>
           </a:bodyPr>
           <a:p>
+            <a:pPr>
+              <a:lnSpc>
+                <a:spcPct val="100000"/>
+              </a:lnSpc>
+            </a:pPr>
             <a:endParaRPr b="0" lang="fr-FR" sz="1800" spc="-1" strike="noStrike">
               <a:solidFill>
                 <a:srgbClr val="000000"/>
@@ -3322,7 +3660,7 @@
         <p:spPr>
           <a:xfrm>
             <a:off x="548640" y="4160520"/>
-            <a:ext cx="2651400" cy="411120"/>
+            <a:ext cx="2651040" cy="410760"/>
           </a:xfrm>
           <a:prstGeom prst="rect">
             <a:avLst/>
@@ -3378,7 +3716,7 @@
         <p:spPr>
           <a:xfrm>
             <a:off x="3429000" y="4160520"/>
-            <a:ext cx="2651400" cy="411120"/>
+            <a:ext cx="2651040" cy="410760"/>
           </a:xfrm>
           <a:prstGeom prst="roundRect">
             <a:avLst>
@@ -3410,6 +3748,11 @@
             <a:noAutofit/>
           </a:bodyPr>
           <a:p>
+            <a:pPr>
+              <a:lnSpc>
+                <a:spcPct val="100000"/>
+              </a:lnSpc>
+            </a:pPr>
             <a:endParaRPr b="0" lang="fr-FR" sz="1800" spc="-1" strike="noStrike">
               <a:solidFill>
                 <a:srgbClr val="ffffff"/>
@@ -3428,7 +3771,7 @@
         <p:spPr>
           <a:xfrm>
             <a:off x="3429000" y="4160520"/>
-            <a:ext cx="2651400" cy="411120"/>
+            <a:ext cx="2651040" cy="410760"/>
           </a:xfrm>
           <a:prstGeom prst="rect">
             <a:avLst/>
@@ -3484,7 +3827,7 @@
         <p:spPr>
           <a:xfrm>
             <a:off x="548640" y="4754880"/>
-            <a:ext cx="8046360" cy="273960"/>
+            <a:ext cx="8046000" cy="273600"/>
           </a:xfrm>
           <a:prstGeom prst="rect">
             <a:avLst/>
@@ -3520,7 +3863,16 @@
                 </a:solidFill>
                 <a:latin typeface="Calibri"/>
               </a:rPr>
-              <a:t>Coach Thiam  ·  Sonatel Academy — Orange Digital Center  ·  Dev Web &amp; Mobile 2024–2025</a:t>
+              <a:t> </a:t>
+            </a:r>
+            <a:r>
+              <a:rPr b="0" lang="en-US" sz="1000" spc="-1" strike="noStrike">
+                <a:solidFill>
+                  <a:srgbClr val="94a3b8"/>
+                </a:solidFill>
+                <a:latin typeface="Calibri"/>
+              </a:rPr>
+              <a:t>Orange Digital Center  ·  Dev Web &amp; Mobile 2026</a:t>
             </a:r>
             <a:endParaRPr b="0" lang="fr-FR" sz="1000" spc="-1" strike="noStrike">
               <a:solidFill>
@@ -3577,7 +3929,7 @@
         <p:spPr>
           <a:xfrm>
             <a:off x="0" y="0"/>
-            <a:ext cx="9143640" cy="1005480"/>
+            <a:ext cx="9143280" cy="1005120"/>
           </a:xfrm>
           <a:prstGeom prst="roundRect">
             <a:avLst>
@@ -3605,6 +3957,11 @@
             <a:noAutofit/>
           </a:bodyPr>
           <a:p>
+            <a:pPr>
+              <a:lnSpc>
+                <a:spcPct val="100000"/>
+              </a:lnSpc>
+            </a:pPr>
             <a:endParaRPr b="0" lang="fr-FR" sz="1800" spc="-1" strike="noStrike">
               <a:solidFill>
                 <a:srgbClr val="ffffff"/>
@@ -3623,7 +3980,7 @@
         <p:spPr>
           <a:xfrm>
             <a:off x="182880" y="137160"/>
-            <a:ext cx="731160" cy="731160"/>
+            <a:ext cx="730800" cy="730800"/>
           </a:xfrm>
           <a:prstGeom prst="ellipse">
             <a:avLst/>
@@ -3649,6 +4006,11 @@
             <a:noAutofit/>
           </a:bodyPr>
           <a:p>
+            <a:pPr>
+              <a:lnSpc>
+                <a:spcPct val="100000"/>
+              </a:lnSpc>
+            </a:pPr>
             <a:endParaRPr b="0" lang="fr-FR" sz="1800" spc="-1" strike="noStrike">
               <a:solidFill>
                 <a:srgbClr val="ffffff"/>
@@ -3667,7 +4029,7 @@
         <p:spPr>
           <a:xfrm>
             <a:off x="182880" y="137160"/>
-            <a:ext cx="731160" cy="731160"/>
+            <a:ext cx="730800" cy="730800"/>
           </a:xfrm>
           <a:prstGeom prst="rect">
             <a:avLst/>
@@ -3723,7 +4085,7 @@
         <p:spPr>
           <a:xfrm>
             <a:off x="1097280" y="137160"/>
-            <a:ext cx="7772040" cy="731160"/>
+            <a:ext cx="7771680" cy="730800"/>
           </a:xfrm>
           <a:prstGeom prst="rect">
             <a:avLst/>
@@ -3779,7 +4141,7 @@
         <p:spPr>
           <a:xfrm>
             <a:off x="274320" y="1097280"/>
-            <a:ext cx="8595000" cy="731160"/>
+            <a:ext cx="8594640" cy="730800"/>
           </a:xfrm>
           <a:prstGeom prst="roundRect">
             <a:avLst>
@@ -3809,6 +4171,11 @@
             <a:noAutofit/>
           </a:bodyPr>
           <a:p>
+            <a:pPr>
+              <a:lnSpc>
+                <a:spcPct val="100000"/>
+              </a:lnSpc>
+            </a:pPr>
             <a:endParaRPr b="0" lang="fr-FR" sz="1800" spc="-1" strike="noStrike">
               <a:solidFill>
                 <a:srgbClr val="ffffff"/>
@@ -3827,7 +4194,7 @@
         <p:spPr>
           <a:xfrm>
             <a:off x="457200" y="1143000"/>
-            <a:ext cx="8229240" cy="639720"/>
+            <a:ext cx="8228880" cy="639360"/>
           </a:xfrm>
           <a:prstGeom prst="rect">
             <a:avLst/>
@@ -3910,7 +4277,7 @@
         <p:spPr>
           <a:xfrm>
             <a:off x="365760" y="1920240"/>
-            <a:ext cx="2651400" cy="1279800"/>
+            <a:ext cx="2651040" cy="1279440"/>
           </a:xfrm>
           <a:prstGeom prst="roundRect">
             <a:avLst>
@@ -3947,6 +4314,11 @@
             <a:noAutofit/>
           </a:bodyPr>
           <a:p>
+            <a:pPr>
+              <a:lnSpc>
+                <a:spcPct val="100000"/>
+              </a:lnSpc>
+            </a:pPr>
             <a:endParaRPr b="0" lang="fr-FR" sz="1800" spc="-1" strike="noStrike">
               <a:solidFill>
                 <a:srgbClr val="ffffff"/>
@@ -3965,7 +4337,7 @@
         <p:spPr>
           <a:xfrm>
             <a:off x="365760" y="2011680"/>
-            <a:ext cx="2651400" cy="639720"/>
+            <a:ext cx="2651040" cy="639360"/>
           </a:xfrm>
           <a:prstGeom prst="rect">
             <a:avLst/>
@@ -4021,7 +4393,7 @@
         <p:spPr>
           <a:xfrm>
             <a:off x="365760" y="2651760"/>
-            <a:ext cx="2651400" cy="456840"/>
+            <a:ext cx="2651040" cy="456480"/>
           </a:xfrm>
           <a:prstGeom prst="rect">
             <a:avLst/>
@@ -4077,7 +4449,7 @@
         <p:spPr>
           <a:xfrm>
             <a:off x="3291840" y="1920240"/>
-            <a:ext cx="2651400" cy="1279800"/>
+            <a:ext cx="2651040" cy="1279440"/>
           </a:xfrm>
           <a:prstGeom prst="roundRect">
             <a:avLst>
@@ -4114,6 +4486,11 @@
             <a:noAutofit/>
           </a:bodyPr>
           <a:p>
+            <a:pPr>
+              <a:lnSpc>
+                <a:spcPct val="100000"/>
+              </a:lnSpc>
+            </a:pPr>
             <a:endParaRPr b="0" lang="fr-FR" sz="1800" spc="-1" strike="noStrike">
               <a:solidFill>
                 <a:srgbClr val="ffffff"/>
@@ -4132,7 +4509,7 @@
         <p:spPr>
           <a:xfrm>
             <a:off x="3291840" y="2011680"/>
-            <a:ext cx="2651400" cy="639720"/>
+            <a:ext cx="2651040" cy="639360"/>
           </a:xfrm>
           <a:prstGeom prst="rect">
             <a:avLst/>
@@ -4188,7 +4565,7 @@
         <p:spPr>
           <a:xfrm>
             <a:off x="3291840" y="2651760"/>
-            <a:ext cx="2651400" cy="456840"/>
+            <a:ext cx="2651040" cy="456480"/>
           </a:xfrm>
           <a:prstGeom prst="rect">
             <a:avLst/>
@@ -4244,7 +4621,7 @@
         <p:spPr>
           <a:xfrm>
             <a:off x="6217920" y="1920240"/>
-            <a:ext cx="2651400" cy="1279800"/>
+            <a:ext cx="2651040" cy="1279440"/>
           </a:xfrm>
           <a:prstGeom prst="roundRect">
             <a:avLst>
@@ -4281,6 +4658,11 @@
             <a:noAutofit/>
           </a:bodyPr>
           <a:p>
+            <a:pPr>
+              <a:lnSpc>
+                <a:spcPct val="100000"/>
+              </a:lnSpc>
+            </a:pPr>
             <a:endParaRPr b="0" lang="fr-FR" sz="1800" spc="-1" strike="noStrike">
               <a:solidFill>
                 <a:srgbClr val="ffffff"/>
@@ -4299,7 +4681,7 @@
         <p:spPr>
           <a:xfrm>
             <a:off x="6217920" y="2011680"/>
-            <a:ext cx="2651400" cy="639720"/>
+            <a:ext cx="2651040" cy="639360"/>
           </a:xfrm>
           <a:prstGeom prst="rect">
             <a:avLst/>
@@ -4355,7 +4737,7 @@
         <p:spPr>
           <a:xfrm>
             <a:off x="6217920" y="2651760"/>
-            <a:ext cx="2651400" cy="456840"/>
+            <a:ext cx="2651040" cy="456480"/>
           </a:xfrm>
           <a:prstGeom prst="rect">
             <a:avLst/>
@@ -4411,7 +4793,7 @@
         <p:spPr>
           <a:xfrm>
             <a:off x="274320" y="3291840"/>
-            <a:ext cx="8595000" cy="365400"/>
+            <a:ext cx="8594640" cy="365040"/>
           </a:xfrm>
           <a:prstGeom prst="rect">
             <a:avLst/>
@@ -4467,7 +4849,7 @@
         <p:spPr>
           <a:xfrm>
             <a:off x="274320" y="3749040"/>
-            <a:ext cx="2834280" cy="502560"/>
+            <a:ext cx="2833920" cy="502200"/>
           </a:xfrm>
           <a:prstGeom prst="roundRect">
             <a:avLst>
@@ -4497,6 +4879,11 @@
             <a:noAutofit/>
           </a:bodyPr>
           <a:p>
+            <a:pPr>
+              <a:lnSpc>
+                <a:spcPct val="100000"/>
+              </a:lnSpc>
+            </a:pPr>
             <a:endParaRPr b="0" lang="fr-FR" sz="1800" spc="-1" strike="noStrike">
               <a:solidFill>
                 <a:srgbClr val="ffffff"/>
@@ -4515,7 +4902,7 @@
         <p:spPr>
           <a:xfrm>
             <a:off x="365760" y="3858840"/>
-            <a:ext cx="273960" cy="273960"/>
+            <a:ext cx="273600" cy="273600"/>
           </a:xfrm>
           <a:prstGeom prst="ellipse">
             <a:avLst/>
@@ -4541,6 +4928,11 @@
             <a:noAutofit/>
           </a:bodyPr>
           <a:p>
+            <a:pPr>
+              <a:lnSpc>
+                <a:spcPct val="100000"/>
+              </a:lnSpc>
+            </a:pPr>
             <a:endParaRPr b="0" lang="fr-FR" sz="1800" spc="-1" strike="noStrike">
               <a:solidFill>
                 <a:srgbClr val="ffffff"/>
@@ -4559,7 +4951,7 @@
         <p:spPr>
           <a:xfrm>
             <a:off x="777240" y="3749040"/>
-            <a:ext cx="1645560" cy="502560"/>
+            <a:ext cx="1645200" cy="502200"/>
           </a:xfrm>
           <a:prstGeom prst="rect">
             <a:avLst/>
@@ -4616,7 +5008,7 @@
         <p:spPr>
           <a:xfrm>
             <a:off x="2423160" y="3749040"/>
-            <a:ext cx="594000" cy="502560"/>
+            <a:ext cx="593640" cy="502200"/>
           </a:xfrm>
           <a:prstGeom prst="rect">
             <a:avLst/>
@@ -4672,7 +5064,7 @@
         <p:spPr>
           <a:xfrm>
             <a:off x="3246120" y="3749040"/>
-            <a:ext cx="2834280" cy="502560"/>
+            <a:ext cx="2833920" cy="502200"/>
           </a:xfrm>
           <a:prstGeom prst="roundRect">
             <a:avLst>
@@ -4702,6 +5094,11 @@
             <a:noAutofit/>
           </a:bodyPr>
           <a:p>
+            <a:pPr>
+              <a:lnSpc>
+                <a:spcPct val="100000"/>
+              </a:lnSpc>
+            </a:pPr>
             <a:endParaRPr b="0" lang="fr-FR" sz="1800" spc="-1" strike="noStrike">
               <a:solidFill>
                 <a:srgbClr val="ffffff"/>
@@ -4720,7 +5117,7 @@
         <p:spPr>
           <a:xfrm>
             <a:off x="3337560" y="3858840"/>
-            <a:ext cx="273960" cy="273960"/>
+            <a:ext cx="273600" cy="273600"/>
           </a:xfrm>
           <a:prstGeom prst="ellipse">
             <a:avLst/>
@@ -4746,6 +5143,11 @@
             <a:noAutofit/>
           </a:bodyPr>
           <a:p>
+            <a:pPr>
+              <a:lnSpc>
+                <a:spcPct val="100000"/>
+              </a:lnSpc>
+            </a:pPr>
             <a:endParaRPr b="0" lang="fr-FR" sz="1800" spc="-1" strike="noStrike">
               <a:solidFill>
                 <a:srgbClr val="000000"/>
@@ -4764,7 +5166,7 @@
         <p:spPr>
           <a:xfrm>
             <a:off x="3749040" y="3749040"/>
-            <a:ext cx="1645560" cy="502560"/>
+            <a:ext cx="1645200" cy="502200"/>
           </a:xfrm>
           <a:prstGeom prst="rect">
             <a:avLst/>
@@ -4821,7 +5223,7 @@
         <p:spPr>
           <a:xfrm>
             <a:off x="5394960" y="3749040"/>
-            <a:ext cx="594000" cy="502560"/>
+            <a:ext cx="593640" cy="502200"/>
           </a:xfrm>
           <a:prstGeom prst="rect">
             <a:avLst/>
@@ -4877,7 +5279,7 @@
         <p:spPr>
           <a:xfrm>
             <a:off x="6217920" y="3749040"/>
-            <a:ext cx="2834280" cy="502560"/>
+            <a:ext cx="2833920" cy="502200"/>
           </a:xfrm>
           <a:prstGeom prst="roundRect">
             <a:avLst>
@@ -4907,6 +5309,11 @@
             <a:noAutofit/>
           </a:bodyPr>
           <a:p>
+            <a:pPr>
+              <a:lnSpc>
+                <a:spcPct val="100000"/>
+              </a:lnSpc>
+            </a:pPr>
             <a:endParaRPr b="0" lang="fr-FR" sz="1800" spc="-1" strike="noStrike">
               <a:solidFill>
                 <a:srgbClr val="ffffff"/>
@@ -4925,7 +5332,7 @@
         <p:spPr>
           <a:xfrm>
             <a:off x="6309360" y="3858840"/>
-            <a:ext cx="273960" cy="273960"/>
+            <a:ext cx="273600" cy="273600"/>
           </a:xfrm>
           <a:prstGeom prst="ellipse">
             <a:avLst/>
@@ -4951,6 +5358,11 @@
             <a:noAutofit/>
           </a:bodyPr>
           <a:p>
+            <a:pPr>
+              <a:lnSpc>
+                <a:spcPct val="100000"/>
+              </a:lnSpc>
+            </a:pPr>
             <a:endParaRPr b="0" lang="fr-FR" sz="1800" spc="-1" strike="noStrike">
               <a:solidFill>
                 <a:srgbClr val="ffffff"/>
@@ -4969,7 +5381,7 @@
         <p:spPr>
           <a:xfrm>
             <a:off x="6720840" y="3749040"/>
-            <a:ext cx="1645560" cy="502560"/>
+            <a:ext cx="1645200" cy="502200"/>
           </a:xfrm>
           <a:prstGeom prst="rect">
             <a:avLst/>
@@ -5026,7 +5438,7 @@
         <p:spPr>
           <a:xfrm>
             <a:off x="8366760" y="3749040"/>
-            <a:ext cx="594000" cy="502560"/>
+            <a:ext cx="593640" cy="502200"/>
           </a:xfrm>
           <a:prstGeom prst="rect">
             <a:avLst/>
@@ -5082,7 +5494,7 @@
         <p:spPr>
           <a:xfrm>
             <a:off x="274320" y="4343400"/>
-            <a:ext cx="2834280" cy="502560"/>
+            <a:ext cx="2833920" cy="502200"/>
           </a:xfrm>
           <a:prstGeom prst="roundRect">
             <a:avLst>
@@ -5112,6 +5524,11 @@
             <a:noAutofit/>
           </a:bodyPr>
           <a:p>
+            <a:pPr>
+              <a:lnSpc>
+                <a:spcPct val="100000"/>
+              </a:lnSpc>
+            </a:pPr>
             <a:endParaRPr b="0" lang="fr-FR" sz="1800" spc="-1" strike="noStrike">
               <a:solidFill>
                 <a:srgbClr val="ffffff"/>
@@ -5130,7 +5547,7 @@
         <p:spPr>
           <a:xfrm>
             <a:off x="365760" y="4453200"/>
-            <a:ext cx="273960" cy="273960"/>
+            <a:ext cx="273600" cy="273600"/>
           </a:xfrm>
           <a:prstGeom prst="ellipse">
             <a:avLst/>
@@ -5156,6 +5573,11 @@
             <a:noAutofit/>
           </a:bodyPr>
           <a:p>
+            <a:pPr>
+              <a:lnSpc>
+                <a:spcPct val="100000"/>
+              </a:lnSpc>
+            </a:pPr>
             <a:endParaRPr b="0" lang="fr-FR" sz="1800" spc="-1" strike="noStrike">
               <a:solidFill>
                 <a:srgbClr val="ffffff"/>
@@ -5174,7 +5596,7 @@
         <p:spPr>
           <a:xfrm>
             <a:off x="777240" y="4343400"/>
-            <a:ext cx="1645560" cy="502560"/>
+            <a:ext cx="1645200" cy="502200"/>
           </a:xfrm>
           <a:prstGeom prst="rect">
             <a:avLst/>
@@ -5231,7 +5653,7 @@
         <p:spPr>
           <a:xfrm>
             <a:off x="2423160" y="4343400"/>
-            <a:ext cx="594000" cy="502560"/>
+            <a:ext cx="593640" cy="502200"/>
           </a:xfrm>
           <a:prstGeom prst="rect">
             <a:avLst/>
@@ -5287,7 +5709,7 @@
         <p:spPr>
           <a:xfrm>
             <a:off x="3246120" y="4343400"/>
-            <a:ext cx="2834280" cy="502560"/>
+            <a:ext cx="2833920" cy="502200"/>
           </a:xfrm>
           <a:prstGeom prst="roundRect">
             <a:avLst>
@@ -5317,6 +5739,11 @@
             <a:noAutofit/>
           </a:bodyPr>
           <a:p>
+            <a:pPr>
+              <a:lnSpc>
+                <a:spcPct val="100000"/>
+              </a:lnSpc>
+            </a:pPr>
             <a:endParaRPr b="0" lang="fr-FR" sz="1800" spc="-1" strike="noStrike">
               <a:solidFill>
                 <a:srgbClr val="ffffff"/>
@@ -5335,7 +5762,7 @@
         <p:spPr>
           <a:xfrm>
             <a:off x="3337560" y="4453200"/>
-            <a:ext cx="273960" cy="273960"/>
+            <a:ext cx="273600" cy="273600"/>
           </a:xfrm>
           <a:prstGeom prst="ellipse">
             <a:avLst/>
@@ -5361,6 +5788,11 @@
             <a:noAutofit/>
           </a:bodyPr>
           <a:p>
+            <a:pPr>
+              <a:lnSpc>
+                <a:spcPct val="100000"/>
+              </a:lnSpc>
+            </a:pPr>
             <a:endParaRPr b="0" lang="fr-FR" sz="1800" spc="-1" strike="noStrike">
               <a:solidFill>
                 <a:srgbClr val="ffffff"/>
@@ -5379,7 +5811,7 @@
         <p:spPr>
           <a:xfrm>
             <a:off x="3749040" y="4343400"/>
-            <a:ext cx="1645560" cy="502560"/>
+            <a:ext cx="1645200" cy="502200"/>
           </a:xfrm>
           <a:prstGeom prst="rect">
             <a:avLst/>
@@ -5436,7 +5868,7 @@
         <p:spPr>
           <a:xfrm>
             <a:off x="5394960" y="4343400"/>
-            <a:ext cx="594000" cy="502560"/>
+            <a:ext cx="593640" cy="502200"/>
           </a:xfrm>
           <a:prstGeom prst="rect">
             <a:avLst/>
@@ -5492,7 +5924,7 @@
         <p:spPr>
           <a:xfrm>
             <a:off x="6217920" y="4343400"/>
-            <a:ext cx="2834280" cy="502560"/>
+            <a:ext cx="2833920" cy="502200"/>
           </a:xfrm>
           <a:prstGeom prst="roundRect">
             <a:avLst>
@@ -5522,6 +5954,11 @@
             <a:noAutofit/>
           </a:bodyPr>
           <a:p>
+            <a:pPr>
+              <a:lnSpc>
+                <a:spcPct val="100000"/>
+              </a:lnSpc>
+            </a:pPr>
             <a:endParaRPr b="0" lang="fr-FR" sz="1800" spc="-1" strike="noStrike">
               <a:solidFill>
                 <a:srgbClr val="ffffff"/>
@@ -5540,7 +5977,7 @@
         <p:spPr>
           <a:xfrm>
             <a:off x="6309360" y="4453200"/>
-            <a:ext cx="273960" cy="273960"/>
+            <a:ext cx="273600" cy="273600"/>
           </a:xfrm>
           <a:prstGeom prst="ellipse">
             <a:avLst/>
@@ -5566,6 +6003,11 @@
             <a:noAutofit/>
           </a:bodyPr>
           <a:p>
+            <a:pPr>
+              <a:lnSpc>
+                <a:spcPct val="100000"/>
+              </a:lnSpc>
+            </a:pPr>
             <a:endParaRPr b="0" lang="fr-FR" sz="1800" spc="-1" strike="noStrike">
               <a:solidFill>
                 <a:srgbClr val="000000"/>
@@ -5584,7 +6026,7 @@
         <p:spPr>
           <a:xfrm>
             <a:off x="6720840" y="4343400"/>
-            <a:ext cx="1645560" cy="502560"/>
+            <a:ext cx="1645200" cy="502200"/>
           </a:xfrm>
           <a:prstGeom prst="rect">
             <a:avLst/>
@@ -5641,7 +6083,7 @@
         <p:spPr>
           <a:xfrm>
             <a:off x="8366760" y="4343400"/>
-            <a:ext cx="594000" cy="502560"/>
+            <a:ext cx="593640" cy="502200"/>
           </a:xfrm>
           <a:prstGeom prst="rect">
             <a:avLst/>
@@ -5734,7 +6176,7 @@
         <p:spPr>
           <a:xfrm>
             <a:off x="0" y="0"/>
-            <a:ext cx="9143640" cy="1005480"/>
+            <a:ext cx="9143280" cy="1005120"/>
           </a:xfrm>
           <a:prstGeom prst="roundRect">
             <a:avLst>
@@ -5762,6 +6204,11 @@
             <a:noAutofit/>
           </a:bodyPr>
           <a:p>
+            <a:pPr>
+              <a:lnSpc>
+                <a:spcPct val="100000"/>
+              </a:lnSpc>
+            </a:pPr>
             <a:endParaRPr b="0" lang="fr-FR" sz="1800" spc="-1" strike="noStrike">
               <a:solidFill>
                 <a:srgbClr val="ffffff"/>
@@ -5780,7 +6227,7 @@
         <p:spPr>
           <a:xfrm>
             <a:off x="182880" y="137160"/>
-            <a:ext cx="731160" cy="731160"/>
+            <a:ext cx="730800" cy="730800"/>
           </a:xfrm>
           <a:prstGeom prst="ellipse">
             <a:avLst/>
@@ -5806,6 +6253,11 @@
             <a:noAutofit/>
           </a:bodyPr>
           <a:p>
+            <a:pPr>
+              <a:lnSpc>
+                <a:spcPct val="100000"/>
+              </a:lnSpc>
+            </a:pPr>
             <a:endParaRPr b="0" lang="fr-FR" sz="1800" spc="-1" strike="noStrike">
               <a:solidFill>
                 <a:srgbClr val="ffffff"/>
@@ -5824,7 +6276,7 @@
         <p:spPr>
           <a:xfrm>
             <a:off x="182880" y="137160"/>
-            <a:ext cx="731160" cy="731160"/>
+            <a:ext cx="730800" cy="730800"/>
           </a:xfrm>
           <a:prstGeom prst="rect">
             <a:avLst/>
@@ -5880,7 +6332,7 @@
         <p:spPr>
           <a:xfrm>
             <a:off x="1097280" y="137160"/>
-            <a:ext cx="7772040" cy="731160"/>
+            <a:ext cx="7771680" cy="730800"/>
           </a:xfrm>
           <a:prstGeom prst="rect">
             <a:avLst/>
@@ -5936,7 +6388,7 @@
         <p:spPr>
           <a:xfrm>
             <a:off x="274320" y="1097280"/>
-            <a:ext cx="8595000" cy="365400"/>
+            <a:ext cx="8594640" cy="365040"/>
           </a:xfrm>
           <a:prstGeom prst="rect">
             <a:avLst/>
@@ -5992,7 +6444,7 @@
         <p:spPr>
           <a:xfrm>
             <a:off x="274320" y="1600200"/>
-            <a:ext cx="411120" cy="411120"/>
+            <a:ext cx="410760" cy="410760"/>
           </a:xfrm>
           <a:prstGeom prst="ellipse">
             <a:avLst/>
@@ -6018,6 +6470,11 @@
             <a:noAutofit/>
           </a:bodyPr>
           <a:p>
+            <a:pPr>
+              <a:lnSpc>
+                <a:spcPct val="100000"/>
+              </a:lnSpc>
+            </a:pPr>
             <a:endParaRPr b="0" lang="fr-FR" sz="1800" spc="-1" strike="noStrike">
               <a:solidFill>
                 <a:srgbClr val="ffffff"/>
@@ -6036,7 +6493,7 @@
         <p:spPr>
           <a:xfrm>
             <a:off x="274320" y="1600200"/>
-            <a:ext cx="411120" cy="411120"/>
+            <a:ext cx="410760" cy="410760"/>
           </a:xfrm>
           <a:prstGeom prst="rect">
             <a:avLst/>
@@ -6092,7 +6549,7 @@
         <p:spPr>
           <a:xfrm>
             <a:off x="822960" y="1600200"/>
-            <a:ext cx="8046360" cy="411120"/>
+            <a:ext cx="8046000" cy="410760"/>
           </a:xfrm>
           <a:prstGeom prst="roundRect">
             <a:avLst>
@@ -6122,6 +6579,11 @@
             <a:noAutofit/>
           </a:bodyPr>
           <a:p>
+            <a:pPr>
+              <a:lnSpc>
+                <a:spcPct val="100000"/>
+              </a:lnSpc>
+            </a:pPr>
             <a:endParaRPr b="0" lang="fr-FR" sz="1800" spc="-1" strike="noStrike">
               <a:solidFill>
                 <a:srgbClr val="ffffff"/>
@@ -6140,7 +6602,7 @@
         <p:spPr>
           <a:xfrm>
             <a:off x="1005840" y="1600200"/>
-            <a:ext cx="7772040" cy="411120"/>
+            <a:ext cx="7771680" cy="410760"/>
           </a:xfrm>
           <a:prstGeom prst="rect">
             <a:avLst/>
@@ -6196,7 +6658,7 @@
         <p:spPr>
           <a:xfrm>
             <a:off x="274320" y="2148840"/>
-            <a:ext cx="411120" cy="411120"/>
+            <a:ext cx="410760" cy="410760"/>
           </a:xfrm>
           <a:prstGeom prst="ellipse">
             <a:avLst/>
@@ -6222,6 +6684,11 @@
             <a:noAutofit/>
           </a:bodyPr>
           <a:p>
+            <a:pPr>
+              <a:lnSpc>
+                <a:spcPct val="100000"/>
+              </a:lnSpc>
+            </a:pPr>
             <a:endParaRPr b="0" lang="fr-FR" sz="1800" spc="-1" strike="noStrike">
               <a:solidFill>
                 <a:srgbClr val="ffffff"/>
@@ -6240,7 +6707,7 @@
         <p:spPr>
           <a:xfrm>
             <a:off x="274320" y="2148840"/>
-            <a:ext cx="411120" cy="411120"/>
+            <a:ext cx="410760" cy="410760"/>
           </a:xfrm>
           <a:prstGeom prst="rect">
             <a:avLst/>
@@ -6296,7 +6763,7 @@
         <p:spPr>
           <a:xfrm>
             <a:off x="822960" y="2148840"/>
-            <a:ext cx="8046360" cy="411120"/>
+            <a:ext cx="8046000" cy="410760"/>
           </a:xfrm>
           <a:prstGeom prst="roundRect">
             <a:avLst>
@@ -6326,6 +6793,11 @@
             <a:noAutofit/>
           </a:bodyPr>
           <a:p>
+            <a:pPr>
+              <a:lnSpc>
+                <a:spcPct val="100000"/>
+              </a:lnSpc>
+            </a:pPr>
             <a:endParaRPr b="0" lang="fr-FR" sz="1800" spc="-1" strike="noStrike">
               <a:solidFill>
                 <a:srgbClr val="ffffff"/>
@@ -6344,7 +6816,7 @@
         <p:spPr>
           <a:xfrm>
             <a:off x="1005840" y="2148840"/>
-            <a:ext cx="7772040" cy="411120"/>
+            <a:ext cx="7771680" cy="410760"/>
           </a:xfrm>
           <a:prstGeom prst="rect">
             <a:avLst/>
@@ -6400,7 +6872,7 @@
         <p:spPr>
           <a:xfrm>
             <a:off x="274320" y="2697480"/>
-            <a:ext cx="411120" cy="411120"/>
+            <a:ext cx="410760" cy="410760"/>
           </a:xfrm>
           <a:prstGeom prst="ellipse">
             <a:avLst/>
@@ -6426,6 +6898,11 @@
             <a:noAutofit/>
           </a:bodyPr>
           <a:p>
+            <a:pPr>
+              <a:lnSpc>
+                <a:spcPct val="100000"/>
+              </a:lnSpc>
+            </a:pPr>
             <a:endParaRPr b="0" lang="fr-FR" sz="1800" spc="-1" strike="noStrike">
               <a:solidFill>
                 <a:srgbClr val="ffffff"/>
@@ -6444,7 +6921,7 @@
         <p:spPr>
           <a:xfrm>
             <a:off x="274320" y="2697480"/>
-            <a:ext cx="411120" cy="411120"/>
+            <a:ext cx="410760" cy="410760"/>
           </a:xfrm>
           <a:prstGeom prst="rect">
             <a:avLst/>
@@ -6500,7 +6977,7 @@
         <p:spPr>
           <a:xfrm>
             <a:off x="822960" y="2697480"/>
-            <a:ext cx="8046360" cy="411120"/>
+            <a:ext cx="8046000" cy="410760"/>
           </a:xfrm>
           <a:prstGeom prst="roundRect">
             <a:avLst>
@@ -6530,6 +7007,11 @@
             <a:noAutofit/>
           </a:bodyPr>
           <a:p>
+            <a:pPr>
+              <a:lnSpc>
+                <a:spcPct val="100000"/>
+              </a:lnSpc>
+            </a:pPr>
             <a:endParaRPr b="0" lang="fr-FR" sz="1800" spc="-1" strike="noStrike">
               <a:solidFill>
                 <a:srgbClr val="ffffff"/>
@@ -6548,7 +7030,7 @@
         <p:spPr>
           <a:xfrm>
             <a:off x="1005840" y="2697480"/>
-            <a:ext cx="7772040" cy="411120"/>
+            <a:ext cx="7771680" cy="410760"/>
           </a:xfrm>
           <a:prstGeom prst="rect">
             <a:avLst/>
@@ -6604,7 +7086,7 @@
         <p:spPr>
           <a:xfrm>
             <a:off x="274320" y="3246120"/>
-            <a:ext cx="411120" cy="411120"/>
+            <a:ext cx="410760" cy="410760"/>
           </a:xfrm>
           <a:prstGeom prst="ellipse">
             <a:avLst/>
@@ -6630,6 +7112,11 @@
             <a:noAutofit/>
           </a:bodyPr>
           <a:p>
+            <a:pPr>
+              <a:lnSpc>
+                <a:spcPct val="100000"/>
+              </a:lnSpc>
+            </a:pPr>
             <a:endParaRPr b="0" lang="fr-FR" sz="1800" spc="-1" strike="noStrike">
               <a:solidFill>
                 <a:srgbClr val="000000"/>
@@ -6648,7 +7135,7 @@
         <p:spPr>
           <a:xfrm>
             <a:off x="274320" y="3246120"/>
-            <a:ext cx="411120" cy="411120"/>
+            <a:ext cx="410760" cy="410760"/>
           </a:xfrm>
           <a:prstGeom prst="rect">
             <a:avLst/>
@@ -6704,7 +7191,7 @@
         <p:spPr>
           <a:xfrm>
             <a:off x="822960" y="3246120"/>
-            <a:ext cx="8046360" cy="411120"/>
+            <a:ext cx="8046000" cy="410760"/>
           </a:xfrm>
           <a:prstGeom prst="roundRect">
             <a:avLst>
@@ -6734,6 +7221,11 @@
             <a:noAutofit/>
           </a:bodyPr>
           <a:p>
+            <a:pPr>
+              <a:lnSpc>
+                <a:spcPct val="100000"/>
+              </a:lnSpc>
+            </a:pPr>
             <a:endParaRPr b="0" lang="fr-FR" sz="1800" spc="-1" strike="noStrike">
               <a:solidFill>
                 <a:srgbClr val="ffffff"/>
@@ -6752,7 +7244,7 @@
         <p:spPr>
           <a:xfrm>
             <a:off x="1005840" y="3246120"/>
-            <a:ext cx="7772040" cy="411120"/>
+            <a:ext cx="7771680" cy="410760"/>
           </a:xfrm>
           <a:prstGeom prst="rect">
             <a:avLst/>
@@ -6808,7 +7300,7 @@
         <p:spPr>
           <a:xfrm>
             <a:off x="274320" y="3840480"/>
-            <a:ext cx="8595000" cy="365400"/>
+            <a:ext cx="8594640" cy="365040"/>
           </a:xfrm>
           <a:prstGeom prst="rect">
             <a:avLst/>
@@ -6864,7 +7356,7 @@
         <p:spPr>
           <a:xfrm>
             <a:off x="274320" y="4251960"/>
-            <a:ext cx="8595000" cy="173520"/>
+            <a:ext cx="8594640" cy="173160"/>
           </a:xfrm>
           <a:prstGeom prst="roundRect">
             <a:avLst>
@@ -6894,6 +7386,11 @@
             <a:noAutofit/>
           </a:bodyPr>
           <a:p>
+            <a:pPr>
+              <a:lnSpc>
+                <a:spcPct val="100000"/>
+              </a:lnSpc>
+            </a:pPr>
             <a:endParaRPr b="0" lang="fr-FR" sz="1800" spc="-1" strike="noStrike">
               <a:solidFill>
                 <a:srgbClr val="ffffff"/>
@@ -6912,7 +7409,7 @@
         <p:spPr>
           <a:xfrm>
             <a:off x="411480" y="4251960"/>
-            <a:ext cx="1828440" cy="173520"/>
+            <a:ext cx="1828080" cy="173160"/>
           </a:xfrm>
           <a:prstGeom prst="rect">
             <a:avLst/>
@@ -6969,7 +7466,7 @@
         <p:spPr>
           <a:xfrm>
             <a:off x="2286000" y="4251960"/>
-            <a:ext cx="6400440" cy="173520"/>
+            <a:ext cx="6400080" cy="173160"/>
           </a:xfrm>
           <a:prstGeom prst="rect">
             <a:avLst/>
@@ -7025,7 +7522,7 @@
         <p:spPr>
           <a:xfrm>
             <a:off x="274320" y="4453200"/>
-            <a:ext cx="8595000" cy="173520"/>
+            <a:ext cx="8594640" cy="173160"/>
           </a:xfrm>
           <a:prstGeom prst="roundRect">
             <a:avLst>
@@ -7055,6 +7552,11 @@
             <a:noAutofit/>
           </a:bodyPr>
           <a:p>
+            <a:pPr>
+              <a:lnSpc>
+                <a:spcPct val="100000"/>
+              </a:lnSpc>
+            </a:pPr>
             <a:endParaRPr b="0" lang="fr-FR" sz="1800" spc="-1" strike="noStrike">
               <a:solidFill>
                 <a:srgbClr val="ffffff"/>
@@ -7073,7 +7575,7 @@
         <p:spPr>
           <a:xfrm>
             <a:off x="411480" y="4453200"/>
-            <a:ext cx="1828440" cy="173520"/>
+            <a:ext cx="1828080" cy="173160"/>
           </a:xfrm>
           <a:prstGeom prst="rect">
             <a:avLst/>
@@ -7130,7 +7632,7 @@
         <p:spPr>
           <a:xfrm>
             <a:off x="2286000" y="4453200"/>
-            <a:ext cx="6400440" cy="173520"/>
+            <a:ext cx="6400080" cy="173160"/>
           </a:xfrm>
           <a:prstGeom prst="rect">
             <a:avLst/>
@@ -7186,7 +7688,7 @@
         <p:spPr>
           <a:xfrm>
             <a:off x="274320" y="4654440"/>
-            <a:ext cx="8595000" cy="173520"/>
+            <a:ext cx="8594640" cy="173160"/>
           </a:xfrm>
           <a:prstGeom prst="roundRect">
             <a:avLst>
@@ -7216,6 +7718,11 @@
             <a:noAutofit/>
           </a:bodyPr>
           <a:p>
+            <a:pPr>
+              <a:lnSpc>
+                <a:spcPct val="100000"/>
+              </a:lnSpc>
+            </a:pPr>
             <a:endParaRPr b="0" lang="fr-FR" sz="1800" spc="-1" strike="noStrike">
               <a:solidFill>
                 <a:srgbClr val="ffffff"/>
@@ -7234,7 +7741,7 @@
         <p:spPr>
           <a:xfrm>
             <a:off x="411480" y="4654440"/>
-            <a:ext cx="1828440" cy="173520"/>
+            <a:ext cx="1828080" cy="173160"/>
           </a:xfrm>
           <a:prstGeom prst="rect">
             <a:avLst/>
@@ -7291,7 +7798,7 @@
         <p:spPr>
           <a:xfrm>
             <a:off x="2286000" y="4654440"/>
-            <a:ext cx="6400440" cy="173520"/>
+            <a:ext cx="6400080" cy="173160"/>
           </a:xfrm>
           <a:prstGeom prst="rect">
             <a:avLst/>
@@ -7347,7 +7854,7 @@
         <p:spPr>
           <a:xfrm>
             <a:off x="274320" y="4855320"/>
-            <a:ext cx="8595000" cy="173520"/>
+            <a:ext cx="8594640" cy="173160"/>
           </a:xfrm>
           <a:prstGeom prst="roundRect">
             <a:avLst>
@@ -7377,6 +7884,11 @@
             <a:noAutofit/>
           </a:bodyPr>
           <a:p>
+            <a:pPr>
+              <a:lnSpc>
+                <a:spcPct val="100000"/>
+              </a:lnSpc>
+            </a:pPr>
             <a:endParaRPr b="0" lang="fr-FR" sz="1800" spc="-1" strike="noStrike">
               <a:solidFill>
                 <a:srgbClr val="ffffff"/>
@@ -7395,7 +7907,7 @@
         <p:spPr>
           <a:xfrm>
             <a:off x="411480" y="4855320"/>
-            <a:ext cx="1828440" cy="173520"/>
+            <a:ext cx="1828080" cy="173160"/>
           </a:xfrm>
           <a:prstGeom prst="rect">
             <a:avLst/>
@@ -7452,7 +7964,7 @@
         <p:spPr>
           <a:xfrm>
             <a:off x="2286000" y="4855320"/>
-            <a:ext cx="6400440" cy="173520"/>
+            <a:ext cx="6400080" cy="173160"/>
           </a:xfrm>
           <a:prstGeom prst="rect">
             <a:avLst/>
@@ -7545,7 +8057,7 @@
         <p:spPr>
           <a:xfrm>
             <a:off x="5943600" y="-457200"/>
-            <a:ext cx="4571640" cy="4571640"/>
+            <a:ext cx="4571280" cy="4571280"/>
           </a:xfrm>
           <a:prstGeom prst="ellipse">
             <a:avLst/>
@@ -7575,6 +8087,11 @@
             <a:noAutofit/>
           </a:bodyPr>
           <a:p>
+            <a:pPr>
+              <a:lnSpc>
+                <a:spcPct val="100000"/>
+              </a:lnSpc>
+            </a:pPr>
             <a:endParaRPr b="0" lang="fr-FR" sz="1800" spc="-1" strike="noStrike">
               <a:solidFill>
                 <a:srgbClr val="ffffff"/>
@@ -7593,7 +8110,7 @@
         <p:spPr>
           <a:xfrm>
             <a:off x="-914400" y="2743200"/>
-            <a:ext cx="3657240" cy="3657240"/>
+            <a:ext cx="3656880" cy="3656880"/>
           </a:xfrm>
           <a:prstGeom prst="ellipse">
             <a:avLst/>
@@ -7623,6 +8140,11 @@
             <a:noAutofit/>
           </a:bodyPr>
           <a:p>
+            <a:pPr>
+              <a:lnSpc>
+                <a:spcPct val="100000"/>
+              </a:lnSpc>
+            </a:pPr>
             <a:endParaRPr b="0" lang="fr-FR" sz="1800" spc="-1" strike="noStrike">
               <a:solidFill>
                 <a:srgbClr val="ffffff"/>
@@ -7641,7 +8163,7 @@
         <p:spPr>
           <a:xfrm>
             <a:off x="457200" y="228600"/>
-            <a:ext cx="8229240" cy="594000"/>
+            <a:ext cx="8228880" cy="593640"/>
           </a:xfrm>
           <a:prstGeom prst="rect">
             <a:avLst/>
@@ -7697,7 +8219,7 @@
         <p:spPr>
           <a:xfrm>
             <a:off x="457200" y="822960"/>
-            <a:ext cx="8229240" cy="365400"/>
+            <a:ext cx="8228880" cy="365040"/>
           </a:xfrm>
           <a:prstGeom prst="rect">
             <a:avLst/>
@@ -7753,7 +8275,7 @@
         <p:spPr>
           <a:xfrm>
             <a:off x="320040" y="1371600"/>
-            <a:ext cx="4160160" cy="1599840"/>
+            <a:ext cx="4159800" cy="1599480"/>
           </a:xfrm>
           <a:prstGeom prst="roundRect">
             <a:avLst>
@@ -7790,6 +8312,11 @@
             <a:noAutofit/>
           </a:bodyPr>
           <a:p>
+            <a:pPr>
+              <a:lnSpc>
+                <a:spcPct val="100000"/>
+              </a:lnSpc>
+            </a:pPr>
             <a:endParaRPr b="0" lang="fr-FR" sz="1800" spc="-1" strike="noStrike">
               <a:solidFill>
                 <a:srgbClr val="ffffff"/>
@@ -7808,7 +8335,7 @@
         <p:spPr>
           <a:xfrm>
             <a:off x="457200" y="1554480"/>
-            <a:ext cx="548280" cy="548280"/>
+            <a:ext cx="547920" cy="547920"/>
           </a:xfrm>
           <a:prstGeom prst="ellipse">
             <a:avLst/>
@@ -7834,6 +8361,11 @@
             <a:noAutofit/>
           </a:bodyPr>
           <a:p>
+            <a:pPr>
+              <a:lnSpc>
+                <a:spcPct val="100000"/>
+              </a:lnSpc>
+            </a:pPr>
             <a:endParaRPr b="0" lang="fr-FR" sz="1800" spc="-1" strike="noStrike">
               <a:solidFill>
                 <a:srgbClr val="ffffff"/>
@@ -7852,7 +8384,7 @@
         <p:spPr>
           <a:xfrm>
             <a:off x="457200" y="1554480"/>
-            <a:ext cx="548280" cy="548280"/>
+            <a:ext cx="547920" cy="547920"/>
           </a:xfrm>
           <a:prstGeom prst="rect">
             <a:avLst/>
@@ -7908,7 +8440,7 @@
         <p:spPr>
           <a:xfrm>
             <a:off x="1143000" y="1554480"/>
-            <a:ext cx="3200040" cy="548280"/>
+            <a:ext cx="3199680" cy="547920"/>
           </a:xfrm>
           <a:prstGeom prst="rect">
             <a:avLst/>
@@ -7964,7 +8496,7 @@
         <p:spPr>
           <a:xfrm>
             <a:off x="502920" y="2176200"/>
-            <a:ext cx="3840120" cy="685440"/>
+            <a:ext cx="3839760" cy="685080"/>
           </a:xfrm>
           <a:prstGeom prst="rect">
             <a:avLst/>
@@ -8020,7 +8552,7 @@
         <p:spPr>
           <a:xfrm>
             <a:off x="4800600" y="1371600"/>
-            <a:ext cx="4160160" cy="1599840"/>
+            <a:ext cx="4159800" cy="1599480"/>
           </a:xfrm>
           <a:prstGeom prst="roundRect">
             <a:avLst>
@@ -8057,6 +8589,11 @@
             <a:noAutofit/>
           </a:bodyPr>
           <a:p>
+            <a:pPr>
+              <a:lnSpc>
+                <a:spcPct val="100000"/>
+              </a:lnSpc>
+            </a:pPr>
             <a:endParaRPr b="0" lang="fr-FR" sz="1800" spc="-1" strike="noStrike">
               <a:solidFill>
                 <a:srgbClr val="ffffff"/>
@@ -8075,7 +8612,7 @@
         <p:spPr>
           <a:xfrm>
             <a:off x="4937760" y="1554480"/>
-            <a:ext cx="548280" cy="548280"/>
+            <a:ext cx="547920" cy="547920"/>
           </a:xfrm>
           <a:prstGeom prst="ellipse">
             <a:avLst/>
@@ -8101,6 +8638,11 @@
             <a:noAutofit/>
           </a:bodyPr>
           <a:p>
+            <a:pPr>
+              <a:lnSpc>
+                <a:spcPct val="100000"/>
+              </a:lnSpc>
+            </a:pPr>
             <a:endParaRPr b="0" lang="fr-FR" sz="1800" spc="-1" strike="noStrike">
               <a:solidFill>
                 <a:srgbClr val="ffffff"/>
@@ -8119,7 +8661,7 @@
         <p:spPr>
           <a:xfrm>
             <a:off x="4937760" y="1554480"/>
-            <a:ext cx="548280" cy="548280"/>
+            <a:ext cx="547920" cy="547920"/>
           </a:xfrm>
           <a:prstGeom prst="rect">
             <a:avLst/>
@@ -8175,7 +8717,7 @@
         <p:spPr>
           <a:xfrm>
             <a:off x="5623560" y="1554480"/>
-            <a:ext cx="3200040" cy="548280"/>
+            <a:ext cx="3199680" cy="547920"/>
           </a:xfrm>
           <a:prstGeom prst="rect">
             <a:avLst/>
@@ -8231,7 +8773,7 @@
         <p:spPr>
           <a:xfrm>
             <a:off x="4983480" y="2176200"/>
-            <a:ext cx="3840120" cy="685440"/>
+            <a:ext cx="3839760" cy="685080"/>
           </a:xfrm>
           <a:prstGeom prst="rect">
             <a:avLst/>
@@ -8287,7 +8829,7 @@
         <p:spPr>
           <a:xfrm>
             <a:off x="320040" y="3154680"/>
-            <a:ext cx="4160160" cy="1599840"/>
+            <a:ext cx="4159800" cy="1599480"/>
           </a:xfrm>
           <a:prstGeom prst="roundRect">
             <a:avLst>
@@ -8324,6 +8866,11 @@
             <a:noAutofit/>
           </a:bodyPr>
           <a:p>
+            <a:pPr>
+              <a:lnSpc>
+                <a:spcPct val="100000"/>
+              </a:lnSpc>
+            </a:pPr>
             <a:endParaRPr b="0" lang="fr-FR" sz="1800" spc="-1" strike="noStrike">
               <a:solidFill>
                 <a:srgbClr val="ffffff"/>
@@ -8342,7 +8889,7 @@
         <p:spPr>
           <a:xfrm>
             <a:off x="457200" y="3337560"/>
-            <a:ext cx="548280" cy="548280"/>
+            <a:ext cx="547920" cy="547920"/>
           </a:xfrm>
           <a:prstGeom prst="ellipse">
             <a:avLst/>
@@ -8368,6 +8915,11 @@
             <a:noAutofit/>
           </a:bodyPr>
           <a:p>
+            <a:pPr>
+              <a:lnSpc>
+                <a:spcPct val="100000"/>
+              </a:lnSpc>
+            </a:pPr>
             <a:endParaRPr b="0" lang="fr-FR" sz="1800" spc="-1" strike="noStrike">
               <a:solidFill>
                 <a:srgbClr val="000000"/>
@@ -8386,7 +8938,7 @@
         <p:spPr>
           <a:xfrm>
             <a:off x="457200" y="3337560"/>
-            <a:ext cx="548280" cy="548280"/>
+            <a:ext cx="547920" cy="547920"/>
           </a:xfrm>
           <a:prstGeom prst="rect">
             <a:avLst/>
@@ -8442,7 +8994,7 @@
         <p:spPr>
           <a:xfrm>
             <a:off x="1143000" y="3337560"/>
-            <a:ext cx="3200040" cy="548280"/>
+            <a:ext cx="3199680" cy="547920"/>
           </a:xfrm>
           <a:prstGeom prst="rect">
             <a:avLst/>
@@ -8498,7 +9050,7 @@
         <p:spPr>
           <a:xfrm>
             <a:off x="502920" y="3959280"/>
-            <a:ext cx="3840120" cy="685440"/>
+            <a:ext cx="3839760" cy="685080"/>
           </a:xfrm>
           <a:prstGeom prst="rect">
             <a:avLst/>
@@ -8554,7 +9106,7 @@
         <p:spPr>
           <a:xfrm>
             <a:off x="4800600" y="3154680"/>
-            <a:ext cx="4160160" cy="1599840"/>
+            <a:ext cx="4159800" cy="1599480"/>
           </a:xfrm>
           <a:prstGeom prst="roundRect">
             <a:avLst>
@@ -8591,6 +9143,11 @@
             <a:noAutofit/>
           </a:bodyPr>
           <a:p>
+            <a:pPr>
+              <a:lnSpc>
+                <a:spcPct val="100000"/>
+              </a:lnSpc>
+            </a:pPr>
             <a:endParaRPr b="0" lang="fr-FR" sz="1800" spc="-1" strike="noStrike">
               <a:solidFill>
                 <a:srgbClr val="ffffff"/>
@@ -8609,7 +9166,7 @@
         <p:spPr>
           <a:xfrm>
             <a:off x="4937760" y="3337560"/>
-            <a:ext cx="548280" cy="548280"/>
+            <a:ext cx="547920" cy="547920"/>
           </a:xfrm>
           <a:prstGeom prst="ellipse">
             <a:avLst/>
@@ -8635,6 +9192,11 @@
             <a:noAutofit/>
           </a:bodyPr>
           <a:p>
+            <a:pPr>
+              <a:lnSpc>
+                <a:spcPct val="100000"/>
+              </a:lnSpc>
+            </a:pPr>
             <a:endParaRPr b="0" lang="fr-FR" sz="1800" spc="-1" strike="noStrike">
               <a:solidFill>
                 <a:srgbClr val="ffffff"/>
@@ -8653,7 +9215,7 @@
         <p:spPr>
           <a:xfrm>
             <a:off x="4937760" y="3337560"/>
-            <a:ext cx="548280" cy="548280"/>
+            <a:ext cx="547920" cy="547920"/>
           </a:xfrm>
           <a:prstGeom prst="rect">
             <a:avLst/>
@@ -8709,7 +9271,7 @@
         <p:spPr>
           <a:xfrm>
             <a:off x="5623560" y="3337560"/>
-            <a:ext cx="3200040" cy="548280"/>
+            <a:ext cx="3199680" cy="547920"/>
           </a:xfrm>
           <a:prstGeom prst="rect">
             <a:avLst/>
@@ -8765,7 +9327,7 @@
         <p:spPr>
           <a:xfrm>
             <a:off x="4983480" y="3959280"/>
-            <a:ext cx="3840120" cy="685440"/>
+            <a:ext cx="3839760" cy="685080"/>
           </a:xfrm>
           <a:prstGeom prst="rect">
             <a:avLst/>
@@ -8821,7 +9383,7 @@
         <p:spPr>
           <a:xfrm>
             <a:off x="457200" y="4773240"/>
-            <a:ext cx="8229240" cy="273960"/>
+            <a:ext cx="8228880" cy="273600"/>
           </a:xfrm>
           <a:prstGeom prst="rect">
             <a:avLst/>
@@ -8914,7 +9476,7 @@
         <p:spPr>
           <a:xfrm>
             <a:off x="457200" y="274320"/>
-            <a:ext cx="8229240" cy="639720"/>
+            <a:ext cx="8228880" cy="639360"/>
           </a:xfrm>
           <a:prstGeom prst="rect">
             <a:avLst/>
@@ -8970,7 +9532,7 @@
         <p:spPr>
           <a:xfrm>
             <a:off x="457200" y="1097280"/>
-            <a:ext cx="502560" cy="502560"/>
+            <a:ext cx="502200" cy="502200"/>
           </a:xfrm>
           <a:prstGeom prst="ellipse">
             <a:avLst/>
@@ -8996,6 +9558,11 @@
             <a:noAutofit/>
           </a:bodyPr>
           <a:p>
+            <a:pPr>
+              <a:lnSpc>
+                <a:spcPct val="100000"/>
+              </a:lnSpc>
+            </a:pPr>
             <a:endParaRPr b="0" lang="fr-FR" sz="1800" spc="-1" strike="noStrike">
               <a:solidFill>
                 <a:srgbClr val="ffffff"/>
@@ -9014,7 +9581,7 @@
         <p:spPr>
           <a:xfrm>
             <a:off x="457200" y="1097280"/>
-            <a:ext cx="502560" cy="502560"/>
+            <a:ext cx="502200" cy="502200"/>
           </a:xfrm>
           <a:prstGeom prst="rect">
             <a:avLst/>
@@ -9070,7 +9637,7 @@
         <p:spPr>
           <a:xfrm>
             <a:off x="1143000" y="1097280"/>
-            <a:ext cx="7497720" cy="502560"/>
+            <a:ext cx="7497360" cy="502200"/>
           </a:xfrm>
           <a:prstGeom prst="roundRect">
             <a:avLst>
@@ -9107,6 +9674,11 @@
             <a:noAutofit/>
           </a:bodyPr>
           <a:p>
+            <a:pPr>
+              <a:lnSpc>
+                <a:spcPct val="100000"/>
+              </a:lnSpc>
+            </a:pPr>
             <a:endParaRPr b="0" lang="fr-FR" sz="1800" spc="-1" strike="noStrike">
               <a:solidFill>
                 <a:srgbClr val="ffffff"/>
@@ -9125,7 +9697,7 @@
         <p:spPr>
           <a:xfrm>
             <a:off x="1371600" y="1097280"/>
-            <a:ext cx="7131960" cy="502560"/>
+            <a:ext cx="7131600" cy="502200"/>
           </a:xfrm>
           <a:prstGeom prst="rect">
             <a:avLst/>
@@ -9181,7 +9753,7 @@
         <p:spPr>
           <a:xfrm>
             <a:off x="457200" y="2011680"/>
-            <a:ext cx="502560" cy="502560"/>
+            <a:ext cx="502200" cy="502200"/>
           </a:xfrm>
           <a:prstGeom prst="ellipse">
             <a:avLst/>
@@ -9207,6 +9779,11 @@
             <a:noAutofit/>
           </a:bodyPr>
           <a:p>
+            <a:pPr>
+              <a:lnSpc>
+                <a:spcPct val="100000"/>
+              </a:lnSpc>
+            </a:pPr>
             <a:endParaRPr b="0" lang="fr-FR" sz="1800" spc="-1" strike="noStrike">
               <a:solidFill>
                 <a:srgbClr val="ffffff"/>
@@ -9225,7 +9802,7 @@
         <p:spPr>
           <a:xfrm>
             <a:off x="457200" y="2011680"/>
-            <a:ext cx="502560" cy="502560"/>
+            <a:ext cx="502200" cy="502200"/>
           </a:xfrm>
           <a:prstGeom prst="rect">
             <a:avLst/>
@@ -9281,7 +9858,7 @@
         <p:spPr>
           <a:xfrm>
             <a:off x="1143000" y="2011680"/>
-            <a:ext cx="7497720" cy="502560"/>
+            <a:ext cx="7497360" cy="502200"/>
           </a:xfrm>
           <a:prstGeom prst="roundRect">
             <a:avLst>
@@ -9318,6 +9895,11 @@
             <a:noAutofit/>
           </a:bodyPr>
           <a:p>
+            <a:pPr>
+              <a:lnSpc>
+                <a:spcPct val="100000"/>
+              </a:lnSpc>
+            </a:pPr>
             <a:endParaRPr b="0" lang="fr-FR" sz="1800" spc="-1" strike="noStrike">
               <a:solidFill>
                 <a:srgbClr val="ffffff"/>
@@ -9336,7 +9918,7 @@
         <p:spPr>
           <a:xfrm>
             <a:off x="1371600" y="2011680"/>
-            <a:ext cx="7131960" cy="502560"/>
+            <a:ext cx="7131600" cy="502200"/>
           </a:xfrm>
           <a:prstGeom prst="rect">
             <a:avLst/>
@@ -9392,7 +9974,7 @@
         <p:spPr>
           <a:xfrm>
             <a:off x="457200" y="2926080"/>
-            <a:ext cx="502560" cy="502560"/>
+            <a:ext cx="502200" cy="502200"/>
           </a:xfrm>
           <a:prstGeom prst="ellipse">
             <a:avLst/>
@@ -9418,6 +10000,11 @@
             <a:noAutofit/>
           </a:bodyPr>
           <a:p>
+            <a:pPr>
+              <a:lnSpc>
+                <a:spcPct val="100000"/>
+              </a:lnSpc>
+            </a:pPr>
             <a:endParaRPr b="0" lang="fr-FR" sz="1800" spc="-1" strike="noStrike">
               <a:solidFill>
                 <a:srgbClr val="000000"/>
@@ -9436,7 +10023,7 @@
         <p:spPr>
           <a:xfrm>
             <a:off x="457200" y="2926080"/>
-            <a:ext cx="502560" cy="502560"/>
+            <a:ext cx="502200" cy="502200"/>
           </a:xfrm>
           <a:prstGeom prst="rect">
             <a:avLst/>
@@ -9492,7 +10079,7 @@
         <p:spPr>
           <a:xfrm>
             <a:off x="1143000" y="2926080"/>
-            <a:ext cx="7497720" cy="502560"/>
+            <a:ext cx="7497360" cy="502200"/>
           </a:xfrm>
           <a:prstGeom prst="roundRect">
             <a:avLst>
@@ -9529,6 +10116,11 @@
             <a:noAutofit/>
           </a:bodyPr>
           <a:p>
+            <a:pPr>
+              <a:lnSpc>
+                <a:spcPct val="100000"/>
+              </a:lnSpc>
+            </a:pPr>
             <a:endParaRPr b="0" lang="fr-FR" sz="1800" spc="-1" strike="noStrike">
               <a:solidFill>
                 <a:srgbClr val="ffffff"/>
@@ -9547,7 +10139,7 @@
         <p:spPr>
           <a:xfrm>
             <a:off x="1371600" y="2926080"/>
-            <a:ext cx="7131960" cy="502560"/>
+            <a:ext cx="7131600" cy="502200"/>
           </a:xfrm>
           <a:prstGeom prst="rect">
             <a:avLst/>
@@ -9603,7 +10195,7 @@
         <p:spPr>
           <a:xfrm>
             <a:off x="457200" y="3840480"/>
-            <a:ext cx="502560" cy="502560"/>
+            <a:ext cx="502200" cy="502200"/>
           </a:xfrm>
           <a:prstGeom prst="ellipse">
             <a:avLst/>
@@ -9629,6 +10221,11 @@
             <a:noAutofit/>
           </a:bodyPr>
           <a:p>
+            <a:pPr>
+              <a:lnSpc>
+                <a:spcPct val="100000"/>
+              </a:lnSpc>
+            </a:pPr>
             <a:endParaRPr b="0" lang="fr-FR" sz="1800" spc="-1" strike="noStrike">
               <a:solidFill>
                 <a:srgbClr val="ffffff"/>
@@ -9647,7 +10244,7 @@
         <p:spPr>
           <a:xfrm>
             <a:off x="457200" y="3840480"/>
-            <a:ext cx="502560" cy="502560"/>
+            <a:ext cx="502200" cy="502200"/>
           </a:xfrm>
           <a:prstGeom prst="rect">
             <a:avLst/>
@@ -9703,7 +10300,7 @@
         <p:spPr>
           <a:xfrm>
             <a:off x="1143000" y="3840480"/>
-            <a:ext cx="7497720" cy="502560"/>
+            <a:ext cx="7497360" cy="502200"/>
           </a:xfrm>
           <a:prstGeom prst="roundRect">
             <a:avLst>
@@ -9740,6 +10337,11 @@
             <a:noAutofit/>
           </a:bodyPr>
           <a:p>
+            <a:pPr>
+              <a:lnSpc>
+                <a:spcPct val="100000"/>
+              </a:lnSpc>
+            </a:pPr>
             <a:endParaRPr b="0" lang="fr-FR" sz="1800" spc="-1" strike="noStrike">
               <a:solidFill>
                 <a:srgbClr val="ffffff"/>
@@ -9758,7 +10360,7 @@
         <p:spPr>
           <a:xfrm>
             <a:off x="1371600" y="3840480"/>
-            <a:ext cx="7131960" cy="502560"/>
+            <a:ext cx="7131600" cy="502200"/>
           </a:xfrm>
           <a:prstGeom prst="rect">
             <a:avLst/>
@@ -9851,7 +10453,7 @@
         <p:spPr>
           <a:xfrm>
             <a:off x="0" y="0"/>
-            <a:ext cx="9143640" cy="1005480"/>
+            <a:ext cx="9143280" cy="1005120"/>
           </a:xfrm>
           <a:prstGeom prst="roundRect">
             <a:avLst>
@@ -9879,6 +10481,11 @@
             <a:noAutofit/>
           </a:bodyPr>
           <a:p>
+            <a:pPr>
+              <a:lnSpc>
+                <a:spcPct val="100000"/>
+              </a:lnSpc>
+            </a:pPr>
             <a:endParaRPr b="0" lang="fr-FR" sz="1800" spc="-1" strike="noStrike">
               <a:solidFill>
                 <a:srgbClr val="ffffff"/>
@@ -9897,7 +10504,7 @@
         <p:spPr>
           <a:xfrm>
             <a:off x="182880" y="137160"/>
-            <a:ext cx="731160" cy="731160"/>
+            <a:ext cx="730800" cy="730800"/>
           </a:xfrm>
           <a:prstGeom prst="ellipse">
             <a:avLst/>
@@ -9923,6 +10530,11 @@
             <a:noAutofit/>
           </a:bodyPr>
           <a:p>
+            <a:pPr>
+              <a:lnSpc>
+                <a:spcPct val="100000"/>
+              </a:lnSpc>
+            </a:pPr>
             <a:endParaRPr b="0" lang="fr-FR" sz="1800" spc="-1" strike="noStrike">
               <a:solidFill>
                 <a:srgbClr val="ffffff"/>
@@ -9941,7 +10553,7 @@
         <p:spPr>
           <a:xfrm>
             <a:off x="182880" y="137160"/>
-            <a:ext cx="731160" cy="731160"/>
+            <a:ext cx="730800" cy="730800"/>
           </a:xfrm>
           <a:prstGeom prst="rect">
             <a:avLst/>
@@ -9997,7 +10609,7 @@
         <p:spPr>
           <a:xfrm>
             <a:off x="1097280" y="137160"/>
-            <a:ext cx="7772040" cy="731160"/>
+            <a:ext cx="7771680" cy="730800"/>
           </a:xfrm>
           <a:prstGeom prst="rect">
             <a:avLst/>
@@ -10053,7 +10665,7 @@
         <p:spPr>
           <a:xfrm>
             <a:off x="274320" y="1143000"/>
-            <a:ext cx="4114440" cy="1462680"/>
+            <a:ext cx="4114080" cy="1462320"/>
           </a:xfrm>
           <a:prstGeom prst="roundRect">
             <a:avLst>
@@ -10090,6 +10702,11 @@
             <a:noAutofit/>
           </a:bodyPr>
           <a:p>
+            <a:pPr>
+              <a:lnSpc>
+                <a:spcPct val="100000"/>
+              </a:lnSpc>
+            </a:pPr>
             <a:endParaRPr b="0" lang="fr-FR" sz="1800" spc="-1" strike="noStrike">
               <a:solidFill>
                 <a:srgbClr val="ffffff"/>
@@ -10108,7 +10725,7 @@
         <p:spPr>
           <a:xfrm>
             <a:off x="457200" y="1188720"/>
-            <a:ext cx="3748680" cy="365400"/>
+            <a:ext cx="3748320" cy="365040"/>
           </a:xfrm>
           <a:prstGeom prst="rect">
             <a:avLst/>
@@ -10164,7 +10781,7 @@
         <p:spPr>
           <a:xfrm>
             <a:off x="457200" y="1572840"/>
-            <a:ext cx="3748680" cy="914040"/>
+            <a:ext cx="3748320" cy="913680"/>
           </a:xfrm>
           <a:prstGeom prst="rect">
             <a:avLst/>
@@ -10238,7 +10855,7 @@
         <p:spPr>
           <a:xfrm>
             <a:off x="4572000" y="1143000"/>
-            <a:ext cx="4297320" cy="1462680"/>
+            <a:ext cx="4296960" cy="1462320"/>
           </a:xfrm>
           <a:prstGeom prst="roundRect">
             <a:avLst>
@@ -10268,6 +10885,11 @@
             <a:noAutofit/>
           </a:bodyPr>
           <a:p>
+            <a:pPr>
+              <a:lnSpc>
+                <a:spcPct val="100000"/>
+              </a:lnSpc>
+            </a:pPr>
             <a:endParaRPr b="0" lang="fr-FR" sz="1800" spc="-1" strike="noStrike">
               <a:solidFill>
                 <a:srgbClr val="ffffff"/>
@@ -10286,7 +10908,7 @@
         <p:spPr>
           <a:xfrm>
             <a:off x="4663440" y="1188720"/>
-            <a:ext cx="4114440" cy="1371240"/>
+            <a:ext cx="4114080" cy="1370880"/>
           </a:xfrm>
           <a:prstGeom prst="rect">
             <a:avLst/>
@@ -10307,6 +10929,11 @@
             <a:noAutofit/>
           </a:bodyPr>
           <a:p>
+            <a:pPr>
+              <a:lnSpc>
+                <a:spcPct val="100000"/>
+              </a:lnSpc>
+            </a:pPr>
             <a:r>
               <a:rPr b="0" lang="en-US" sz="1100" spc="-1" strike="noStrike">
                 <a:solidFill>
@@ -10365,6 +10992,11 @@
             </a:endParaRPr>
           </a:p>
           <a:p>
+            <a:pPr>
+              <a:lnSpc>
+                <a:spcPct val="100000"/>
+              </a:lnSpc>
+            </a:pPr>
             <a:r>
               <a:rPr b="0" lang="en-US" sz="1100" spc="-1" strike="noStrike">
                 <a:solidFill>
@@ -10403,6 +11035,11 @@
             </a:endParaRPr>
           </a:p>
           <a:p>
+            <a:pPr>
+              <a:lnSpc>
+                <a:spcPct val="100000"/>
+              </a:lnSpc>
+            </a:pPr>
             <a:r>
               <a:rPr b="0" lang="en-US" sz="1100" spc="-1" strike="noStrike">
                 <a:solidFill>
@@ -10487,7 +11124,7 @@
         <p:spPr>
           <a:xfrm>
             <a:off x="274320" y="2788920"/>
-            <a:ext cx="4114440" cy="2057040"/>
+            <a:ext cx="4114080" cy="2056680"/>
           </a:xfrm>
           <a:prstGeom prst="roundRect">
             <a:avLst>
@@ -10524,6 +11161,11 @@
             <a:noAutofit/>
           </a:bodyPr>
           <a:p>
+            <a:pPr>
+              <a:lnSpc>
+                <a:spcPct val="100000"/>
+              </a:lnSpc>
+            </a:pPr>
             <a:endParaRPr b="0" lang="fr-FR" sz="1800" spc="-1" strike="noStrike">
               <a:solidFill>
                 <a:srgbClr val="ffffff"/>
@@ -10542,7 +11184,7 @@
         <p:spPr>
           <a:xfrm>
             <a:off x="457200" y="2834640"/>
-            <a:ext cx="3748680" cy="365400"/>
+            <a:ext cx="3748320" cy="365040"/>
           </a:xfrm>
           <a:prstGeom prst="rect">
             <a:avLst/>
@@ -10598,7 +11240,7 @@
         <p:spPr>
           <a:xfrm>
             <a:off x="457200" y="3218760"/>
-            <a:ext cx="3748680" cy="1554120"/>
+            <a:ext cx="3748320" cy="1553760"/>
           </a:xfrm>
           <a:prstGeom prst="rect">
             <a:avLst/>
@@ -10619,6 +11261,11 @@
             <a:noAutofit/>
           </a:bodyPr>
           <a:p>
+            <a:pPr>
+              <a:lnSpc>
+                <a:spcPct val="100000"/>
+              </a:lnSpc>
+            </a:pPr>
             <a:r>
               <a:rPr b="0" lang="en-US" sz="1100" spc="-1" strike="noStrike">
                 <a:solidFill>
@@ -10647,6 +11294,11 @@
             </a:endParaRPr>
           </a:p>
           <a:p>
+            <a:pPr>
+              <a:lnSpc>
+                <a:spcPct val="100000"/>
+              </a:lnSpc>
+            </a:pPr>
             <a:r>
               <a:rPr b="0" lang="en-US" sz="1100" spc="-1" strike="noStrike">
                 <a:solidFill>
@@ -10715,6 +11367,11 @@
             </a:endParaRPr>
           </a:p>
           <a:p>
+            <a:pPr>
+              <a:lnSpc>
+                <a:spcPct val="100000"/>
+              </a:lnSpc>
+            </a:pPr>
             <a:r>
               <a:rPr b="0" lang="en-US" sz="1100" spc="-1" strike="noStrike">
                 <a:solidFill>
@@ -10789,7 +11446,7 @@
         <p:spPr>
           <a:xfrm>
             <a:off x="4572000" y="2788920"/>
-            <a:ext cx="4297320" cy="2057040"/>
+            <a:ext cx="4296960" cy="2056680"/>
           </a:xfrm>
           <a:prstGeom prst="roundRect">
             <a:avLst>
@@ -10826,6 +11483,11 @@
             <a:noAutofit/>
           </a:bodyPr>
           <a:p>
+            <a:pPr>
+              <a:lnSpc>
+                <a:spcPct val="100000"/>
+              </a:lnSpc>
+            </a:pPr>
             <a:endParaRPr b="0" lang="fr-FR" sz="1800" spc="-1" strike="noStrike">
               <a:solidFill>
                 <a:srgbClr val="ffffff"/>
@@ -10844,7 +11506,7 @@
         <p:spPr>
           <a:xfrm>
             <a:off x="4754880" y="2834640"/>
-            <a:ext cx="3931560" cy="365400"/>
+            <a:ext cx="3931200" cy="365040"/>
           </a:xfrm>
           <a:prstGeom prst="rect">
             <a:avLst/>
@@ -10900,7 +11562,7 @@
         <p:spPr>
           <a:xfrm>
             <a:off x="4846320" y="3200400"/>
-            <a:ext cx="3840120" cy="1554120"/>
+            <a:ext cx="3839760" cy="1553760"/>
           </a:xfrm>
           <a:prstGeom prst="rect">
             <a:avLst/>
@@ -11076,7 +11738,7 @@
         <p:spPr>
           <a:xfrm>
             <a:off x="0" y="0"/>
-            <a:ext cx="9143640" cy="1005480"/>
+            <a:ext cx="9143280" cy="1005120"/>
           </a:xfrm>
           <a:prstGeom prst="roundRect">
             <a:avLst>
@@ -11104,6 +11766,11 @@
             <a:noAutofit/>
           </a:bodyPr>
           <a:p>
+            <a:pPr>
+              <a:lnSpc>
+                <a:spcPct val="100000"/>
+              </a:lnSpc>
+            </a:pPr>
             <a:endParaRPr b="0" lang="fr-FR" sz="1800" spc="-1" strike="noStrike">
               <a:solidFill>
                 <a:srgbClr val="ffffff"/>
@@ -11122,7 +11789,7 @@
         <p:spPr>
           <a:xfrm>
             <a:off x="182880" y="137160"/>
-            <a:ext cx="731160" cy="731160"/>
+            <a:ext cx="730800" cy="730800"/>
           </a:xfrm>
           <a:prstGeom prst="ellipse">
             <a:avLst/>
@@ -11148,6 +11815,11 @@
             <a:noAutofit/>
           </a:bodyPr>
           <a:p>
+            <a:pPr>
+              <a:lnSpc>
+                <a:spcPct val="100000"/>
+              </a:lnSpc>
+            </a:pPr>
             <a:endParaRPr b="0" lang="fr-FR" sz="1800" spc="-1" strike="noStrike">
               <a:solidFill>
                 <a:srgbClr val="ffffff"/>
@@ -11166,7 +11838,7 @@
         <p:spPr>
           <a:xfrm>
             <a:off x="182880" y="137160"/>
-            <a:ext cx="731160" cy="731160"/>
+            <a:ext cx="730800" cy="730800"/>
           </a:xfrm>
           <a:prstGeom prst="rect">
             <a:avLst/>
@@ -11222,7 +11894,7 @@
         <p:spPr>
           <a:xfrm>
             <a:off x="1097280" y="137160"/>
-            <a:ext cx="7772040" cy="731160"/>
+            <a:ext cx="7771680" cy="730800"/>
           </a:xfrm>
           <a:prstGeom prst="rect">
             <a:avLst/>
@@ -11278,7 +11950,7 @@
         <p:spPr>
           <a:xfrm>
             <a:off x="274320" y="1051560"/>
-            <a:ext cx="8595000" cy="411120"/>
+            <a:ext cx="8594640" cy="410760"/>
           </a:xfrm>
           <a:prstGeom prst="rect">
             <a:avLst/>
@@ -11334,7 +12006,7 @@
         <p:spPr>
           <a:xfrm>
             <a:off x="274320" y="1508760"/>
-            <a:ext cx="4114440" cy="1416960"/>
+            <a:ext cx="4114080" cy="1416600"/>
           </a:xfrm>
           <a:prstGeom prst="roundRect">
             <a:avLst>
@@ -11364,6 +12036,11 @@
             <a:noAutofit/>
           </a:bodyPr>
           <a:p>
+            <a:pPr>
+              <a:lnSpc>
+                <a:spcPct val="100000"/>
+              </a:lnSpc>
+            </a:pPr>
             <a:endParaRPr b="0" lang="fr-FR" sz="1800" spc="-1" strike="noStrike">
               <a:solidFill>
                 <a:srgbClr val="ffffff"/>
@@ -11382,7 +12059,7 @@
         <p:spPr>
           <a:xfrm>
             <a:off x="457200" y="1554480"/>
-            <a:ext cx="3657240" cy="319680"/>
+            <a:ext cx="3656880" cy="319320"/>
           </a:xfrm>
           <a:prstGeom prst="rect">
             <a:avLst/>
@@ -11447,7 +12124,7 @@
         <p:spPr>
           <a:xfrm>
             <a:off x="457200" y="1874520"/>
-            <a:ext cx="3748680" cy="1005480"/>
+            <a:ext cx="3748320" cy="1005120"/>
           </a:xfrm>
           <a:prstGeom prst="rect">
             <a:avLst/>
@@ -11622,7 +12299,7 @@
         <p:spPr>
           <a:xfrm>
             <a:off x="4754880" y="1508760"/>
-            <a:ext cx="4114440" cy="1416960"/>
+            <a:ext cx="4114080" cy="1416600"/>
           </a:xfrm>
           <a:prstGeom prst="roundRect">
             <a:avLst>
@@ -11652,6 +12329,11 @@
             <a:noAutofit/>
           </a:bodyPr>
           <a:p>
+            <a:pPr>
+              <a:lnSpc>
+                <a:spcPct val="100000"/>
+              </a:lnSpc>
+            </a:pPr>
             <a:endParaRPr b="0" lang="fr-FR" sz="1800" spc="-1" strike="noStrike">
               <a:solidFill>
                 <a:srgbClr val="ffffff"/>
@@ -11670,7 +12352,7 @@
         <p:spPr>
           <a:xfrm>
             <a:off x="4937760" y="1554480"/>
-            <a:ext cx="3657240" cy="319680"/>
+            <a:ext cx="3656880" cy="319320"/>
           </a:xfrm>
           <a:prstGeom prst="rect">
             <a:avLst/>
@@ -11735,7 +12417,7 @@
         <p:spPr>
           <a:xfrm>
             <a:off x="4937760" y="1874520"/>
-            <a:ext cx="3748680" cy="1005480"/>
+            <a:ext cx="3748320" cy="1005120"/>
           </a:xfrm>
           <a:prstGeom prst="rect">
             <a:avLst/>
@@ -11842,7 +12524,7 @@
         <p:spPr>
           <a:xfrm>
             <a:off x="274320" y="3063240"/>
-            <a:ext cx="2742840" cy="1782720"/>
+            <a:ext cx="2742480" cy="1782360"/>
           </a:xfrm>
           <a:prstGeom prst="roundRect">
             <a:avLst>
@@ -11879,6 +12561,11 @@
             <a:noAutofit/>
           </a:bodyPr>
           <a:p>
+            <a:pPr>
+              <a:lnSpc>
+                <a:spcPct val="100000"/>
+              </a:lnSpc>
+            </a:pPr>
             <a:endParaRPr b="0" lang="fr-FR" sz="1800" spc="-1" strike="noStrike">
               <a:solidFill>
                 <a:srgbClr val="ffffff"/>
@@ -11897,7 +12584,7 @@
         <p:spPr>
           <a:xfrm>
             <a:off x="411480" y="3200400"/>
-            <a:ext cx="456840" cy="456840"/>
+            <a:ext cx="456480" cy="456480"/>
           </a:xfrm>
           <a:prstGeom prst="roundRect">
             <a:avLst>
@@ -11925,6 +12612,11 @@
             <a:noAutofit/>
           </a:bodyPr>
           <a:p>
+            <a:pPr>
+              <a:lnSpc>
+                <a:spcPct val="100000"/>
+              </a:lnSpc>
+            </a:pPr>
             <a:endParaRPr b="0" lang="fr-FR" sz="1800" spc="-1" strike="noStrike">
               <a:solidFill>
                 <a:srgbClr val="ffffff"/>
@@ -11943,7 +12635,7 @@
         <p:spPr>
           <a:xfrm>
             <a:off x="1005840" y="3200400"/>
-            <a:ext cx="1828440" cy="456840"/>
+            <a:ext cx="1828080" cy="456480"/>
           </a:xfrm>
           <a:prstGeom prst="rect">
             <a:avLst/>
@@ -11999,7 +12691,7 @@
         <p:spPr>
           <a:xfrm>
             <a:off x="457200" y="3749040"/>
-            <a:ext cx="2468520" cy="959760"/>
+            <a:ext cx="2468160" cy="959400"/>
           </a:xfrm>
           <a:prstGeom prst="rect">
             <a:avLst/>
@@ -12055,7 +12747,7 @@
         <p:spPr>
           <a:xfrm>
             <a:off x="3227760" y="3063240"/>
-            <a:ext cx="2742840" cy="1782720"/>
+            <a:ext cx="2742480" cy="1782360"/>
           </a:xfrm>
           <a:prstGeom prst="roundRect">
             <a:avLst>
@@ -12092,6 +12784,11 @@
             <a:noAutofit/>
           </a:bodyPr>
           <a:p>
+            <a:pPr>
+              <a:lnSpc>
+                <a:spcPct val="100000"/>
+              </a:lnSpc>
+            </a:pPr>
             <a:endParaRPr b="0" lang="fr-FR" sz="1800" spc="-1" strike="noStrike">
               <a:solidFill>
                 <a:srgbClr val="ffffff"/>
@@ -12110,7 +12807,7 @@
         <p:spPr>
           <a:xfrm>
             <a:off x="3364920" y="3200400"/>
-            <a:ext cx="456840" cy="456840"/>
+            <a:ext cx="456480" cy="456480"/>
           </a:xfrm>
           <a:prstGeom prst="roundRect">
             <a:avLst>
@@ -12138,6 +12835,11 @@
             <a:noAutofit/>
           </a:bodyPr>
           <a:p>
+            <a:pPr>
+              <a:lnSpc>
+                <a:spcPct val="100000"/>
+              </a:lnSpc>
+            </a:pPr>
             <a:endParaRPr b="0" lang="fr-FR" sz="1800" spc="-1" strike="noStrike">
               <a:solidFill>
                 <a:srgbClr val="ffffff"/>
@@ -12156,7 +12858,7 @@
         <p:spPr>
           <a:xfrm>
             <a:off x="3959280" y="3200400"/>
-            <a:ext cx="1828440" cy="456840"/>
+            <a:ext cx="1828080" cy="456480"/>
           </a:xfrm>
           <a:prstGeom prst="rect">
             <a:avLst/>
@@ -12212,7 +12914,7 @@
         <p:spPr>
           <a:xfrm>
             <a:off x="3410640" y="3749040"/>
-            <a:ext cx="2468520" cy="959760"/>
+            <a:ext cx="2468160" cy="959400"/>
           </a:xfrm>
           <a:prstGeom prst="rect">
             <a:avLst/>
@@ -12268,7 +12970,7 @@
         <p:spPr>
           <a:xfrm>
             <a:off x="6181200" y="3063240"/>
-            <a:ext cx="2742840" cy="1782720"/>
+            <a:ext cx="2742480" cy="1782360"/>
           </a:xfrm>
           <a:prstGeom prst="roundRect">
             <a:avLst>
@@ -12305,6 +13007,11 @@
             <a:noAutofit/>
           </a:bodyPr>
           <a:p>
+            <a:pPr>
+              <a:lnSpc>
+                <a:spcPct val="100000"/>
+              </a:lnSpc>
+            </a:pPr>
             <a:endParaRPr b="0" lang="fr-FR" sz="1800" spc="-1" strike="noStrike">
               <a:solidFill>
                 <a:srgbClr val="ffffff"/>
@@ -12323,7 +13030,7 @@
         <p:spPr>
           <a:xfrm>
             <a:off x="6318360" y="3200400"/>
-            <a:ext cx="456840" cy="456840"/>
+            <a:ext cx="456480" cy="456480"/>
           </a:xfrm>
           <a:prstGeom prst="roundRect">
             <a:avLst>
@@ -12351,6 +13058,11 @@
             <a:noAutofit/>
           </a:bodyPr>
           <a:p>
+            <a:pPr>
+              <a:lnSpc>
+                <a:spcPct val="100000"/>
+              </a:lnSpc>
+            </a:pPr>
             <a:endParaRPr b="0" lang="fr-FR" sz="1800" spc="-1" strike="noStrike">
               <a:solidFill>
                 <a:srgbClr val="ffffff"/>
@@ -12369,7 +13081,7 @@
         <p:spPr>
           <a:xfrm>
             <a:off x="6912720" y="3200400"/>
-            <a:ext cx="1828440" cy="456840"/>
+            <a:ext cx="1828080" cy="456480"/>
           </a:xfrm>
           <a:prstGeom prst="rect">
             <a:avLst/>
@@ -12425,7 +13137,7 @@
         <p:spPr>
           <a:xfrm>
             <a:off x="6364080" y="3749040"/>
-            <a:ext cx="2468520" cy="959760"/>
+            <a:ext cx="2468160" cy="959400"/>
           </a:xfrm>
           <a:prstGeom prst="rect">
             <a:avLst/>
@@ -12518,7 +13230,7 @@
         <p:spPr>
           <a:xfrm>
             <a:off x="0" y="0"/>
-            <a:ext cx="9143640" cy="1005480"/>
+            <a:ext cx="9143280" cy="1005120"/>
           </a:xfrm>
           <a:prstGeom prst="roundRect">
             <a:avLst>
@@ -12546,6 +13258,11 @@
             <a:noAutofit/>
           </a:bodyPr>
           <a:p>
+            <a:pPr>
+              <a:lnSpc>
+                <a:spcPct val="100000"/>
+              </a:lnSpc>
+            </a:pPr>
             <a:endParaRPr b="0" lang="fr-FR" sz="1800" spc="-1" strike="noStrike">
               <a:solidFill>
                 <a:srgbClr val="ffffff"/>
@@ -12564,7 +13281,7 @@
         <p:spPr>
           <a:xfrm>
             <a:off x="182880" y="137160"/>
-            <a:ext cx="731160" cy="731160"/>
+            <a:ext cx="730800" cy="730800"/>
           </a:xfrm>
           <a:prstGeom prst="ellipse">
             <a:avLst/>
@@ -12590,6 +13307,11 @@
             <a:noAutofit/>
           </a:bodyPr>
           <a:p>
+            <a:pPr>
+              <a:lnSpc>
+                <a:spcPct val="100000"/>
+              </a:lnSpc>
+            </a:pPr>
             <a:endParaRPr b="0" lang="fr-FR" sz="1800" spc="-1" strike="noStrike">
               <a:solidFill>
                 <a:srgbClr val="ffffff"/>
@@ -12608,7 +13330,7 @@
         <p:spPr>
           <a:xfrm>
             <a:off x="182880" y="137160"/>
-            <a:ext cx="731160" cy="731160"/>
+            <a:ext cx="730800" cy="730800"/>
           </a:xfrm>
           <a:prstGeom prst="rect">
             <a:avLst/>
@@ -12664,7 +13386,7 @@
         <p:spPr>
           <a:xfrm>
             <a:off x="1097280" y="137160"/>
-            <a:ext cx="7772040" cy="731160"/>
+            <a:ext cx="7771680" cy="730800"/>
           </a:xfrm>
           <a:prstGeom prst="rect">
             <a:avLst/>
@@ -12720,7 +13442,7 @@
         <p:spPr>
           <a:xfrm>
             <a:off x="274320" y="1097280"/>
-            <a:ext cx="8595000" cy="731160"/>
+            <a:ext cx="8594640" cy="730800"/>
           </a:xfrm>
           <a:prstGeom prst="roundRect">
             <a:avLst>
@@ -12750,6 +13472,11 @@
             <a:noAutofit/>
           </a:bodyPr>
           <a:p>
+            <a:pPr>
+              <a:lnSpc>
+                <a:spcPct val="100000"/>
+              </a:lnSpc>
+            </a:pPr>
             <a:endParaRPr b="0" lang="fr-FR" sz="1800" spc="-1" strike="noStrike">
               <a:solidFill>
                 <a:srgbClr val="ffffff"/>
@@ -12768,7 +13495,7 @@
         <p:spPr>
           <a:xfrm>
             <a:off x="457200" y="1143000"/>
-            <a:ext cx="8229240" cy="639720"/>
+            <a:ext cx="8228880" cy="639360"/>
           </a:xfrm>
           <a:prstGeom prst="rect">
             <a:avLst/>
@@ -12851,7 +13578,7 @@
         <p:spPr>
           <a:xfrm>
             <a:off x="274320" y="1965960"/>
-            <a:ext cx="4754520" cy="2651400"/>
+            <a:ext cx="4754160" cy="2651040"/>
           </a:xfrm>
           <a:prstGeom prst="roundRect">
             <a:avLst>
@@ -12881,6 +13608,11 @@
             <a:noAutofit/>
           </a:bodyPr>
           <a:p>
+            <a:pPr>
+              <a:lnSpc>
+                <a:spcPct val="100000"/>
+              </a:lnSpc>
+            </a:pPr>
             <a:endParaRPr b="0" lang="fr-FR" sz="1800" spc="-1" strike="noStrike">
               <a:solidFill>
                 <a:srgbClr val="ffffff"/>
@@ -12899,7 +13631,7 @@
         <p:spPr>
           <a:xfrm>
             <a:off x="457200" y="2011680"/>
-            <a:ext cx="4388760" cy="365400"/>
+            <a:ext cx="4388400" cy="365040"/>
           </a:xfrm>
           <a:prstGeom prst="rect">
             <a:avLst/>
@@ -12955,7 +13687,7 @@
         <p:spPr>
           <a:xfrm>
             <a:off x="457200" y="2423160"/>
-            <a:ext cx="4480200" cy="2102760"/>
+            <a:ext cx="4479840" cy="2102400"/>
           </a:xfrm>
           <a:prstGeom prst="rect">
             <a:avLst/>
@@ -12976,6 +13708,11 @@
             <a:noAutofit/>
           </a:bodyPr>
           <a:p>
+            <a:pPr>
+              <a:lnSpc>
+                <a:spcPct val="100000"/>
+              </a:lnSpc>
+            </a:pPr>
             <a:r>
               <a:rPr b="0" lang="en-US" sz="1100" spc="-1" strike="noStrike">
                 <a:solidFill>
@@ -13394,7 +14131,7 @@
         <p:spPr>
           <a:xfrm>
             <a:off x="5212080" y="1965960"/>
-            <a:ext cx="3657240" cy="2651400"/>
+            <a:ext cx="3656880" cy="2651040"/>
           </a:xfrm>
           <a:prstGeom prst="roundRect">
             <a:avLst>
@@ -13431,6 +14168,11 @@
             <a:noAutofit/>
           </a:bodyPr>
           <a:p>
+            <a:pPr>
+              <a:lnSpc>
+                <a:spcPct val="100000"/>
+              </a:lnSpc>
+            </a:pPr>
             <a:endParaRPr b="0" lang="fr-FR" sz="1800" spc="-1" strike="noStrike">
               <a:solidFill>
                 <a:srgbClr val="ffffff"/>
@@ -13449,7 +14191,7 @@
         <p:spPr>
           <a:xfrm>
             <a:off x="5394960" y="2011680"/>
-            <a:ext cx="3291480" cy="365400"/>
+            <a:ext cx="3291120" cy="365040"/>
           </a:xfrm>
           <a:prstGeom prst="rect">
             <a:avLst/>
@@ -13505,7 +14247,7 @@
         <p:spPr>
           <a:xfrm>
             <a:off x="5394960" y="2423160"/>
-            <a:ext cx="3291480" cy="2102760"/>
+            <a:ext cx="3291120" cy="2102400"/>
           </a:xfrm>
           <a:prstGeom prst="rect">
             <a:avLst/>
@@ -13809,7 +14551,7 @@
         <p:spPr>
           <a:xfrm>
             <a:off x="0" y="0"/>
-            <a:ext cx="9143640" cy="1005480"/>
+            <a:ext cx="9143280" cy="1005120"/>
           </a:xfrm>
           <a:prstGeom prst="roundRect">
             <a:avLst>
@@ -13837,6 +14579,11 @@
             <a:noAutofit/>
           </a:bodyPr>
           <a:p>
+            <a:pPr>
+              <a:lnSpc>
+                <a:spcPct val="100000"/>
+              </a:lnSpc>
+            </a:pPr>
             <a:endParaRPr b="0" lang="fr-FR" sz="1800" spc="-1" strike="noStrike">
               <a:solidFill>
                 <a:srgbClr val="ffffff"/>
@@ -13855,7 +14602,7 @@
         <p:spPr>
           <a:xfrm>
             <a:off x="182880" y="137160"/>
-            <a:ext cx="731160" cy="731160"/>
+            <a:ext cx="730800" cy="730800"/>
           </a:xfrm>
           <a:prstGeom prst="ellipse">
             <a:avLst/>
@@ -13881,6 +14628,11 @@
             <a:noAutofit/>
           </a:bodyPr>
           <a:p>
+            <a:pPr>
+              <a:lnSpc>
+                <a:spcPct val="100000"/>
+              </a:lnSpc>
+            </a:pPr>
             <a:endParaRPr b="0" lang="fr-FR" sz="1800" spc="-1" strike="noStrike">
               <a:solidFill>
                 <a:srgbClr val="ffffff"/>
@@ -13899,7 +14651,7 @@
         <p:spPr>
           <a:xfrm>
             <a:off x="182880" y="137160"/>
-            <a:ext cx="731160" cy="731160"/>
+            <a:ext cx="730800" cy="730800"/>
           </a:xfrm>
           <a:prstGeom prst="rect">
             <a:avLst/>
@@ -13955,7 +14707,7 @@
         <p:spPr>
           <a:xfrm>
             <a:off x="1097280" y="137160"/>
-            <a:ext cx="7772040" cy="731160"/>
+            <a:ext cx="7771680" cy="730800"/>
           </a:xfrm>
           <a:prstGeom prst="rect">
             <a:avLst/>
@@ -14011,7 +14763,7 @@
         <p:spPr>
           <a:xfrm>
             <a:off x="182880" y="1143000"/>
-            <a:ext cx="2834280" cy="1737000"/>
+            <a:ext cx="2833920" cy="1736640"/>
           </a:xfrm>
           <a:prstGeom prst="roundRect">
             <a:avLst>
@@ -14048,6 +14800,11 @@
             <a:noAutofit/>
           </a:bodyPr>
           <a:p>
+            <a:pPr>
+              <a:lnSpc>
+                <a:spcPct val="100000"/>
+              </a:lnSpc>
+            </a:pPr>
             <a:endParaRPr b="0" lang="fr-FR" sz="1800" spc="-1" strike="noStrike">
               <a:solidFill>
                 <a:srgbClr val="ffffff"/>
@@ -14066,7 +14823,7 @@
         <p:spPr>
           <a:xfrm>
             <a:off x="292680" y="1252800"/>
-            <a:ext cx="2651400" cy="319680"/>
+            <a:ext cx="2651040" cy="319320"/>
           </a:xfrm>
           <a:prstGeom prst="roundRect">
             <a:avLst>
@@ -14098,6 +14855,11 @@
             <a:noAutofit/>
           </a:bodyPr>
           <a:p>
+            <a:pPr>
+              <a:lnSpc>
+                <a:spcPct val="100000"/>
+              </a:lnSpc>
+            </a:pPr>
             <a:endParaRPr b="0" lang="fr-FR" sz="1800" spc="-1" strike="noStrike">
               <a:solidFill>
                 <a:srgbClr val="ffffff"/>
@@ -14116,7 +14878,7 @@
         <p:spPr>
           <a:xfrm>
             <a:off x="320040" y="1252800"/>
-            <a:ext cx="2605680" cy="319680"/>
+            <a:ext cx="2605320" cy="319320"/>
           </a:xfrm>
           <a:prstGeom prst="rect">
             <a:avLst/>
@@ -14172,7 +14934,7 @@
         <p:spPr>
           <a:xfrm>
             <a:off x="320040" y="1600200"/>
-            <a:ext cx="2605680" cy="456840"/>
+            <a:ext cx="2605320" cy="456480"/>
           </a:xfrm>
           <a:prstGeom prst="rect">
             <a:avLst/>
@@ -14228,7 +14990,7 @@
         <p:spPr>
           <a:xfrm>
             <a:off x="274320" y="2103120"/>
-            <a:ext cx="2651400" cy="667080"/>
+            <a:ext cx="2651040" cy="666720"/>
           </a:xfrm>
           <a:prstGeom prst="roundRect">
             <a:avLst>
@@ -14258,6 +15020,11 @@
             <a:noAutofit/>
           </a:bodyPr>
           <a:p>
+            <a:pPr>
+              <a:lnSpc>
+                <a:spcPct val="100000"/>
+              </a:lnSpc>
+            </a:pPr>
             <a:endParaRPr b="0" lang="fr-FR" sz="1800" spc="-1" strike="noStrike">
               <a:solidFill>
                 <a:srgbClr val="ffffff"/>
@@ -14276,7 +15043,7 @@
         <p:spPr>
           <a:xfrm>
             <a:off x="347400" y="2148840"/>
-            <a:ext cx="2514240" cy="575640"/>
+            <a:ext cx="2513880" cy="575280"/>
           </a:xfrm>
           <a:prstGeom prst="rect">
             <a:avLst/>
@@ -14333,7 +15100,7 @@
         <p:spPr>
           <a:xfrm>
             <a:off x="3182040" y="1143000"/>
-            <a:ext cx="2834280" cy="1737000"/>
+            <a:ext cx="2833920" cy="1736640"/>
           </a:xfrm>
           <a:prstGeom prst="roundRect">
             <a:avLst>
@@ -14370,6 +15137,11 @@
             <a:noAutofit/>
           </a:bodyPr>
           <a:p>
+            <a:pPr>
+              <a:lnSpc>
+                <a:spcPct val="100000"/>
+              </a:lnSpc>
+            </a:pPr>
             <a:endParaRPr b="0" lang="fr-FR" sz="1800" spc="-1" strike="noStrike">
               <a:solidFill>
                 <a:srgbClr val="ffffff"/>
@@ -14388,7 +15160,7 @@
         <p:spPr>
           <a:xfrm>
             <a:off x="3291840" y="1252800"/>
-            <a:ext cx="2651400" cy="319680"/>
+            <a:ext cx="2651040" cy="319320"/>
           </a:xfrm>
           <a:prstGeom prst="roundRect">
             <a:avLst>
@@ -14420,6 +15192,11 @@
             <a:noAutofit/>
           </a:bodyPr>
           <a:p>
+            <a:pPr>
+              <a:lnSpc>
+                <a:spcPct val="100000"/>
+              </a:lnSpc>
+            </a:pPr>
             <a:endParaRPr b="0" lang="fr-FR" sz="1800" spc="-1" strike="noStrike">
               <a:solidFill>
                 <a:srgbClr val="ffffff"/>
@@ -14438,7 +15215,7 @@
         <p:spPr>
           <a:xfrm>
             <a:off x="3319200" y="1252800"/>
-            <a:ext cx="2605680" cy="319680"/>
+            <a:ext cx="2605320" cy="319320"/>
           </a:xfrm>
           <a:prstGeom prst="rect">
             <a:avLst/>
@@ -14494,7 +15271,7 @@
         <p:spPr>
           <a:xfrm>
             <a:off x="3319200" y="1600200"/>
-            <a:ext cx="2605680" cy="456840"/>
+            <a:ext cx="2605320" cy="456480"/>
           </a:xfrm>
           <a:prstGeom prst="rect">
             <a:avLst/>
@@ -14550,7 +15327,7 @@
         <p:spPr>
           <a:xfrm>
             <a:off x="3273480" y="2103120"/>
-            <a:ext cx="2651400" cy="667080"/>
+            <a:ext cx="2651040" cy="666720"/>
           </a:xfrm>
           <a:prstGeom prst="roundRect">
             <a:avLst>
@@ -14580,6 +15357,11 @@
             <a:noAutofit/>
           </a:bodyPr>
           <a:p>
+            <a:pPr>
+              <a:lnSpc>
+                <a:spcPct val="100000"/>
+              </a:lnSpc>
+            </a:pPr>
             <a:endParaRPr b="0" lang="fr-FR" sz="1800" spc="-1" strike="noStrike">
               <a:solidFill>
                 <a:srgbClr val="ffffff"/>
@@ -14598,7 +15380,7 @@
         <p:spPr>
           <a:xfrm>
             <a:off x="3346560" y="2148840"/>
-            <a:ext cx="2514240" cy="575640"/>
+            <a:ext cx="2513880" cy="575280"/>
           </a:xfrm>
           <a:prstGeom prst="rect">
             <a:avLst/>
@@ -14655,7 +15437,7 @@
         <p:spPr>
           <a:xfrm>
             <a:off x="6181200" y="1143000"/>
-            <a:ext cx="2834280" cy="1737000"/>
+            <a:ext cx="2833920" cy="1736640"/>
           </a:xfrm>
           <a:prstGeom prst="roundRect">
             <a:avLst>
@@ -14692,6 +15474,11 @@
             <a:noAutofit/>
           </a:bodyPr>
           <a:p>
+            <a:pPr>
+              <a:lnSpc>
+                <a:spcPct val="100000"/>
+              </a:lnSpc>
+            </a:pPr>
             <a:endParaRPr b="0" lang="fr-FR" sz="1800" spc="-1" strike="noStrike">
               <a:solidFill>
                 <a:srgbClr val="ffffff"/>
@@ -14710,7 +15497,7 @@
         <p:spPr>
           <a:xfrm>
             <a:off x="6291000" y="1252800"/>
-            <a:ext cx="2651400" cy="319680"/>
+            <a:ext cx="2651040" cy="319320"/>
           </a:xfrm>
           <a:prstGeom prst="roundRect">
             <a:avLst>
@@ -14742,6 +15529,11 @@
             <a:noAutofit/>
           </a:bodyPr>
           <a:p>
+            <a:pPr>
+              <a:lnSpc>
+                <a:spcPct val="100000"/>
+              </a:lnSpc>
+            </a:pPr>
             <a:endParaRPr b="0" lang="fr-FR" sz="1800" spc="-1" strike="noStrike">
               <a:solidFill>
                 <a:srgbClr val="000000"/>
@@ -14760,7 +15552,7 @@
         <p:spPr>
           <a:xfrm>
             <a:off x="6318360" y="1252800"/>
-            <a:ext cx="2605680" cy="319680"/>
+            <a:ext cx="2605320" cy="319320"/>
           </a:xfrm>
           <a:prstGeom prst="rect">
             <a:avLst/>
@@ -14816,7 +15608,7 @@
         <p:spPr>
           <a:xfrm>
             <a:off x="6318360" y="1600200"/>
-            <a:ext cx="2605680" cy="456840"/>
+            <a:ext cx="2605320" cy="456480"/>
           </a:xfrm>
           <a:prstGeom prst="rect">
             <a:avLst/>
@@ -14872,7 +15664,7 @@
         <p:spPr>
           <a:xfrm>
             <a:off x="6272640" y="2103120"/>
-            <a:ext cx="2651400" cy="667080"/>
+            <a:ext cx="2651040" cy="666720"/>
           </a:xfrm>
           <a:prstGeom prst="roundRect">
             <a:avLst>
@@ -14902,6 +15694,11 @@
             <a:noAutofit/>
           </a:bodyPr>
           <a:p>
+            <a:pPr>
+              <a:lnSpc>
+                <a:spcPct val="100000"/>
+              </a:lnSpc>
+            </a:pPr>
             <a:endParaRPr b="0" lang="fr-FR" sz="1800" spc="-1" strike="noStrike">
               <a:solidFill>
                 <a:srgbClr val="ffffff"/>
@@ -14920,7 +15717,7 @@
         <p:spPr>
           <a:xfrm>
             <a:off x="6346080" y="2148840"/>
-            <a:ext cx="2514240" cy="575640"/>
+            <a:ext cx="2513880" cy="575280"/>
           </a:xfrm>
           <a:prstGeom prst="rect">
             <a:avLst/>
@@ -14977,7 +15774,7 @@
         <p:spPr>
           <a:xfrm>
             <a:off x="182880" y="3063240"/>
-            <a:ext cx="2834280" cy="1737000"/>
+            <a:ext cx="2833920" cy="1736640"/>
           </a:xfrm>
           <a:prstGeom prst="roundRect">
             <a:avLst>
@@ -15014,6 +15811,11 @@
             <a:noAutofit/>
           </a:bodyPr>
           <a:p>
+            <a:pPr>
+              <a:lnSpc>
+                <a:spcPct val="100000"/>
+              </a:lnSpc>
+            </a:pPr>
             <a:endParaRPr b="0" lang="fr-FR" sz="1800" spc="-1" strike="noStrike">
               <a:solidFill>
                 <a:srgbClr val="ffffff"/>
@@ -15032,7 +15834,7 @@
         <p:spPr>
           <a:xfrm>
             <a:off x="292680" y="3173040"/>
-            <a:ext cx="2651400" cy="319680"/>
+            <a:ext cx="2651040" cy="319320"/>
           </a:xfrm>
           <a:prstGeom prst="roundRect">
             <a:avLst>
@@ -15064,6 +15866,11 @@
             <a:noAutofit/>
           </a:bodyPr>
           <a:p>
+            <a:pPr>
+              <a:lnSpc>
+                <a:spcPct val="100000"/>
+              </a:lnSpc>
+            </a:pPr>
             <a:endParaRPr b="0" lang="fr-FR" sz="1800" spc="-1" strike="noStrike">
               <a:solidFill>
                 <a:srgbClr val="ffffff"/>
@@ -15082,7 +15889,7 @@
         <p:spPr>
           <a:xfrm>
             <a:off x="320040" y="3173040"/>
-            <a:ext cx="2605680" cy="319680"/>
+            <a:ext cx="2605320" cy="319320"/>
           </a:xfrm>
           <a:prstGeom prst="rect">
             <a:avLst/>
@@ -15138,7 +15945,7 @@
         <p:spPr>
           <a:xfrm>
             <a:off x="320040" y="3520440"/>
-            <a:ext cx="2605680" cy="456840"/>
+            <a:ext cx="2605320" cy="456480"/>
           </a:xfrm>
           <a:prstGeom prst="rect">
             <a:avLst/>
@@ -15194,7 +16001,7 @@
         <p:spPr>
           <a:xfrm>
             <a:off x="274320" y="4023360"/>
-            <a:ext cx="2651400" cy="667080"/>
+            <a:ext cx="2651040" cy="666720"/>
           </a:xfrm>
           <a:prstGeom prst="roundRect">
             <a:avLst>
@@ -15224,6 +16031,11 @@
             <a:noAutofit/>
           </a:bodyPr>
           <a:p>
+            <a:pPr>
+              <a:lnSpc>
+                <a:spcPct val="100000"/>
+              </a:lnSpc>
+            </a:pPr>
             <a:endParaRPr b="0" lang="fr-FR" sz="1800" spc="-1" strike="noStrike">
               <a:solidFill>
                 <a:srgbClr val="ffffff"/>
@@ -15242,7 +16054,7 @@
         <p:spPr>
           <a:xfrm>
             <a:off x="347400" y="4069080"/>
-            <a:ext cx="2514240" cy="575640"/>
+            <a:ext cx="2513880" cy="575280"/>
           </a:xfrm>
           <a:prstGeom prst="rect">
             <a:avLst/>
@@ -15299,7 +16111,7 @@
         <p:spPr>
           <a:xfrm>
             <a:off x="3182040" y="3063240"/>
-            <a:ext cx="2834280" cy="1737000"/>
+            <a:ext cx="2833920" cy="1736640"/>
           </a:xfrm>
           <a:prstGeom prst="roundRect">
             <a:avLst>
@@ -15336,6 +16148,11 @@
             <a:noAutofit/>
           </a:bodyPr>
           <a:p>
+            <a:pPr>
+              <a:lnSpc>
+                <a:spcPct val="100000"/>
+              </a:lnSpc>
+            </a:pPr>
             <a:endParaRPr b="0" lang="fr-FR" sz="1800" spc="-1" strike="noStrike">
               <a:solidFill>
                 <a:srgbClr val="ffffff"/>
@@ -15354,7 +16171,7 @@
         <p:spPr>
           <a:xfrm>
             <a:off x="3291840" y="3173040"/>
-            <a:ext cx="2651400" cy="319680"/>
+            <a:ext cx="2651040" cy="319320"/>
           </a:xfrm>
           <a:prstGeom prst="roundRect">
             <a:avLst>
@@ -15386,6 +16203,11 @@
             <a:noAutofit/>
           </a:bodyPr>
           <a:p>
+            <a:pPr>
+              <a:lnSpc>
+                <a:spcPct val="100000"/>
+              </a:lnSpc>
+            </a:pPr>
             <a:endParaRPr b="0" lang="fr-FR" sz="1800" spc="-1" strike="noStrike">
               <a:solidFill>
                 <a:srgbClr val="ffffff"/>
@@ -15404,7 +16226,7 @@
         <p:spPr>
           <a:xfrm>
             <a:off x="3319200" y="3173040"/>
-            <a:ext cx="2605680" cy="319680"/>
+            <a:ext cx="2605320" cy="319320"/>
           </a:xfrm>
           <a:prstGeom prst="rect">
             <a:avLst/>
@@ -15460,7 +16282,7 @@
         <p:spPr>
           <a:xfrm>
             <a:off x="3319200" y="3520440"/>
-            <a:ext cx="2605680" cy="456840"/>
+            <a:ext cx="2605320" cy="456480"/>
           </a:xfrm>
           <a:prstGeom prst="rect">
             <a:avLst/>
@@ -15516,7 +16338,7 @@
         <p:spPr>
           <a:xfrm>
             <a:off x="3273480" y="4023360"/>
-            <a:ext cx="2651400" cy="667080"/>
+            <a:ext cx="2651040" cy="666720"/>
           </a:xfrm>
           <a:prstGeom prst="roundRect">
             <a:avLst>
@@ -15546,6 +16368,11 @@
             <a:noAutofit/>
           </a:bodyPr>
           <a:p>
+            <a:pPr>
+              <a:lnSpc>
+                <a:spcPct val="100000"/>
+              </a:lnSpc>
+            </a:pPr>
             <a:endParaRPr b="0" lang="fr-FR" sz="1800" spc="-1" strike="noStrike">
               <a:solidFill>
                 <a:srgbClr val="ffffff"/>
@@ -15564,7 +16391,7 @@
         <p:spPr>
           <a:xfrm>
             <a:off x="3346560" y="4069080"/>
-            <a:ext cx="2514240" cy="575640"/>
+            <a:ext cx="2513880" cy="575280"/>
           </a:xfrm>
           <a:prstGeom prst="rect">
             <a:avLst/>
@@ -15621,7 +16448,7 @@
         <p:spPr>
           <a:xfrm>
             <a:off x="6181200" y="3063240"/>
-            <a:ext cx="2834280" cy="1737000"/>
+            <a:ext cx="2833920" cy="1736640"/>
           </a:xfrm>
           <a:prstGeom prst="roundRect">
             <a:avLst>
@@ -15658,6 +16485,11 @@
             <a:noAutofit/>
           </a:bodyPr>
           <a:p>
+            <a:pPr>
+              <a:lnSpc>
+                <a:spcPct val="100000"/>
+              </a:lnSpc>
+            </a:pPr>
             <a:endParaRPr b="0" lang="fr-FR" sz="1800" spc="-1" strike="noStrike">
               <a:solidFill>
                 <a:srgbClr val="ffffff"/>
@@ -15676,7 +16508,7 @@
         <p:spPr>
           <a:xfrm>
             <a:off x="6291000" y="3173040"/>
-            <a:ext cx="2651400" cy="319680"/>
+            <a:ext cx="2651040" cy="319320"/>
           </a:xfrm>
           <a:prstGeom prst="roundRect">
             <a:avLst>
@@ -15708,6 +16540,11 @@
             <a:noAutofit/>
           </a:bodyPr>
           <a:p>
+            <a:pPr>
+              <a:lnSpc>
+                <a:spcPct val="100000"/>
+              </a:lnSpc>
+            </a:pPr>
             <a:endParaRPr b="0" lang="fr-FR" sz="1800" spc="-1" strike="noStrike">
               <a:solidFill>
                 <a:srgbClr val="ffffff"/>
@@ -15726,7 +16563,7 @@
         <p:spPr>
           <a:xfrm>
             <a:off x="6318360" y="3173040"/>
-            <a:ext cx="2605680" cy="319680"/>
+            <a:ext cx="2605320" cy="319320"/>
           </a:xfrm>
           <a:prstGeom prst="rect">
             <a:avLst/>
@@ -15782,7 +16619,7 @@
         <p:spPr>
           <a:xfrm>
             <a:off x="6318360" y="3520440"/>
-            <a:ext cx="2605680" cy="456840"/>
+            <a:ext cx="2605320" cy="456480"/>
           </a:xfrm>
           <a:prstGeom prst="rect">
             <a:avLst/>
@@ -15838,7 +16675,7 @@
         <p:spPr>
           <a:xfrm>
             <a:off x="6272640" y="4023360"/>
-            <a:ext cx="2651400" cy="667080"/>
+            <a:ext cx="2651040" cy="666720"/>
           </a:xfrm>
           <a:prstGeom prst="roundRect">
             <a:avLst>
@@ -15868,6 +16705,11 @@
             <a:noAutofit/>
           </a:bodyPr>
           <a:p>
+            <a:pPr>
+              <a:lnSpc>
+                <a:spcPct val="100000"/>
+              </a:lnSpc>
+            </a:pPr>
             <a:endParaRPr b="0" lang="fr-FR" sz="1800" spc="-1" strike="noStrike">
               <a:solidFill>
                 <a:srgbClr val="ffffff"/>
@@ -15886,7 +16728,7 @@
         <p:spPr>
           <a:xfrm>
             <a:off x="6346080" y="4069080"/>
-            <a:ext cx="2514240" cy="575640"/>
+            <a:ext cx="2513880" cy="575280"/>
           </a:xfrm>
           <a:prstGeom prst="rect">
             <a:avLst/>
@@ -15980,7 +16822,7 @@
         <p:spPr>
           <a:xfrm>
             <a:off x="0" y="0"/>
-            <a:ext cx="9143640" cy="1005480"/>
+            <a:ext cx="9143280" cy="1005120"/>
           </a:xfrm>
           <a:prstGeom prst="roundRect">
             <a:avLst>
@@ -16008,6 +16850,11 @@
             <a:noAutofit/>
           </a:bodyPr>
           <a:p>
+            <a:pPr>
+              <a:lnSpc>
+                <a:spcPct val="100000"/>
+              </a:lnSpc>
+            </a:pPr>
             <a:endParaRPr b="0" lang="fr-FR" sz="1800" spc="-1" strike="noStrike">
               <a:solidFill>
                 <a:srgbClr val="ffffff"/>
@@ -16026,7 +16873,7 @@
         <p:spPr>
           <a:xfrm>
             <a:off x="182880" y="137160"/>
-            <a:ext cx="731160" cy="731160"/>
+            <a:ext cx="730800" cy="730800"/>
           </a:xfrm>
           <a:prstGeom prst="ellipse">
             <a:avLst/>
@@ -16052,6 +16899,11 @@
             <a:noAutofit/>
           </a:bodyPr>
           <a:p>
+            <a:pPr>
+              <a:lnSpc>
+                <a:spcPct val="100000"/>
+              </a:lnSpc>
+            </a:pPr>
             <a:endParaRPr b="0" lang="fr-FR" sz="1800" spc="-1" strike="noStrike">
               <a:solidFill>
                 <a:srgbClr val="ffffff"/>
@@ -16070,7 +16922,7 @@
         <p:spPr>
           <a:xfrm>
             <a:off x="182880" y="137160"/>
-            <a:ext cx="731160" cy="731160"/>
+            <a:ext cx="730800" cy="730800"/>
           </a:xfrm>
           <a:prstGeom prst="rect">
             <a:avLst/>
@@ -16126,7 +16978,7 @@
         <p:spPr>
           <a:xfrm>
             <a:off x="1097280" y="137160"/>
-            <a:ext cx="7772040" cy="731160"/>
+            <a:ext cx="7771680" cy="730800"/>
           </a:xfrm>
           <a:prstGeom prst="rect">
             <a:avLst/>
@@ -16182,7 +17034,7 @@
         <p:spPr>
           <a:xfrm>
             <a:off x="274320" y="1143000"/>
-            <a:ext cx="1298160" cy="685440"/>
+            <a:ext cx="1297800" cy="685080"/>
           </a:xfrm>
           <a:prstGeom prst="roundRect">
             <a:avLst>
@@ -16212,6 +17064,11 @@
             <a:noAutofit/>
           </a:bodyPr>
           <a:p>
+            <a:pPr>
+              <a:lnSpc>
+                <a:spcPct val="100000"/>
+              </a:lnSpc>
+            </a:pPr>
             <a:endParaRPr b="0" lang="fr-FR" sz="1800" spc="-1" strike="noStrike">
               <a:solidFill>
                 <a:srgbClr val="ffffff"/>
@@ -16230,7 +17087,7 @@
         <p:spPr>
           <a:xfrm>
             <a:off x="274320" y="1170360"/>
-            <a:ext cx="1298160" cy="347040"/>
+            <a:ext cx="1297800" cy="346680"/>
           </a:xfrm>
           <a:prstGeom prst="rect">
             <a:avLst/>
@@ -16286,7 +17143,7 @@
         <p:spPr>
           <a:xfrm>
             <a:off x="274320" y="1517760"/>
-            <a:ext cx="1298160" cy="273960"/>
+            <a:ext cx="1297800" cy="273600"/>
           </a:xfrm>
           <a:prstGeom prst="rect">
             <a:avLst/>
@@ -16342,7 +17199,7 @@
         <p:spPr>
           <a:xfrm>
             <a:off x="1719000" y="1143000"/>
-            <a:ext cx="1298160" cy="685440"/>
+            <a:ext cx="1297800" cy="685080"/>
           </a:xfrm>
           <a:prstGeom prst="roundRect">
             <a:avLst>
@@ -16372,6 +17229,11 @@
             <a:noAutofit/>
           </a:bodyPr>
           <a:p>
+            <a:pPr>
+              <a:lnSpc>
+                <a:spcPct val="100000"/>
+              </a:lnSpc>
+            </a:pPr>
             <a:endParaRPr b="0" lang="fr-FR" sz="1800" spc="-1" strike="noStrike">
               <a:solidFill>
                 <a:srgbClr val="ffffff"/>
@@ -16390,7 +17252,7 @@
         <p:spPr>
           <a:xfrm>
             <a:off x="1719000" y="1170360"/>
-            <a:ext cx="1298160" cy="347040"/>
+            <a:ext cx="1297800" cy="346680"/>
           </a:xfrm>
           <a:prstGeom prst="rect">
             <a:avLst/>
@@ -16446,7 +17308,7 @@
         <p:spPr>
           <a:xfrm>
             <a:off x="1719000" y="1517760"/>
-            <a:ext cx="1298160" cy="273960"/>
+            <a:ext cx="1297800" cy="273600"/>
           </a:xfrm>
           <a:prstGeom prst="rect">
             <a:avLst/>
@@ -16502,7 +17364,7 @@
         <p:spPr>
           <a:xfrm>
             <a:off x="3163680" y="1143000"/>
-            <a:ext cx="1298160" cy="685440"/>
+            <a:ext cx="1297800" cy="685080"/>
           </a:xfrm>
           <a:prstGeom prst="roundRect">
             <a:avLst>
@@ -16532,6 +17394,11 @@
             <a:noAutofit/>
           </a:bodyPr>
           <a:p>
+            <a:pPr>
+              <a:lnSpc>
+                <a:spcPct val="100000"/>
+              </a:lnSpc>
+            </a:pPr>
             <a:endParaRPr b="0" lang="fr-FR" sz="1800" spc="-1" strike="noStrike">
               <a:solidFill>
                 <a:srgbClr val="ffffff"/>
@@ -16550,7 +17417,7 @@
         <p:spPr>
           <a:xfrm>
             <a:off x="3163680" y="1170360"/>
-            <a:ext cx="1298160" cy="347040"/>
+            <a:ext cx="1297800" cy="346680"/>
           </a:xfrm>
           <a:prstGeom prst="rect">
             <a:avLst/>
@@ -16606,7 +17473,7 @@
         <p:spPr>
           <a:xfrm>
             <a:off x="3163680" y="1517760"/>
-            <a:ext cx="1298160" cy="273960"/>
+            <a:ext cx="1297800" cy="273600"/>
           </a:xfrm>
           <a:prstGeom prst="rect">
             <a:avLst/>
@@ -16662,7 +17529,7 @@
         <p:spPr>
           <a:xfrm>
             <a:off x="4608720" y="1143000"/>
-            <a:ext cx="1298160" cy="685440"/>
+            <a:ext cx="1297800" cy="685080"/>
           </a:xfrm>
           <a:prstGeom prst="roundRect">
             <a:avLst>
@@ -16692,6 +17559,11 @@
             <a:noAutofit/>
           </a:bodyPr>
           <a:p>
+            <a:pPr>
+              <a:lnSpc>
+                <a:spcPct val="100000"/>
+              </a:lnSpc>
+            </a:pPr>
             <a:endParaRPr b="0" lang="fr-FR" sz="1800" spc="-1" strike="noStrike">
               <a:solidFill>
                 <a:srgbClr val="ffffff"/>
@@ -16710,7 +17582,7 @@
         <p:spPr>
           <a:xfrm>
             <a:off x="4608720" y="1170360"/>
-            <a:ext cx="1298160" cy="347040"/>
+            <a:ext cx="1297800" cy="346680"/>
           </a:xfrm>
           <a:prstGeom prst="rect">
             <a:avLst/>
@@ -16766,7 +17638,7 @@
         <p:spPr>
           <a:xfrm>
             <a:off x="4608720" y="1517760"/>
-            <a:ext cx="1298160" cy="273960"/>
+            <a:ext cx="1297800" cy="273600"/>
           </a:xfrm>
           <a:prstGeom prst="rect">
             <a:avLst/>
@@ -16822,7 +17694,7 @@
         <p:spPr>
           <a:xfrm>
             <a:off x="6053400" y="1143000"/>
-            <a:ext cx="1298160" cy="685440"/>
+            <a:ext cx="1297800" cy="685080"/>
           </a:xfrm>
           <a:prstGeom prst="roundRect">
             <a:avLst>
@@ -16852,6 +17724,11 @@
             <a:noAutofit/>
           </a:bodyPr>
           <a:p>
+            <a:pPr>
+              <a:lnSpc>
+                <a:spcPct val="100000"/>
+              </a:lnSpc>
+            </a:pPr>
             <a:endParaRPr b="0" lang="fr-FR" sz="1800" spc="-1" strike="noStrike">
               <a:solidFill>
                 <a:srgbClr val="ffffff"/>
@@ -16870,7 +17747,7 @@
         <p:spPr>
           <a:xfrm>
             <a:off x="6053400" y="1170360"/>
-            <a:ext cx="1298160" cy="347040"/>
+            <a:ext cx="1297800" cy="346680"/>
           </a:xfrm>
           <a:prstGeom prst="rect">
             <a:avLst/>
@@ -16926,7 +17803,7 @@
         <p:spPr>
           <a:xfrm>
             <a:off x="6053400" y="1517760"/>
-            <a:ext cx="1298160" cy="273960"/>
+            <a:ext cx="1297800" cy="273600"/>
           </a:xfrm>
           <a:prstGeom prst="rect">
             <a:avLst/>
@@ -16982,7 +17859,7 @@
         <p:spPr>
           <a:xfrm>
             <a:off x="7498080" y="1143000"/>
-            <a:ext cx="1298160" cy="685440"/>
+            <a:ext cx="1297800" cy="685080"/>
           </a:xfrm>
           <a:prstGeom prst="roundRect">
             <a:avLst>
@@ -17012,6 +17889,11 @@
             <a:noAutofit/>
           </a:bodyPr>
           <a:p>
+            <a:pPr>
+              <a:lnSpc>
+                <a:spcPct val="100000"/>
+              </a:lnSpc>
+            </a:pPr>
             <a:endParaRPr b="0" lang="fr-FR" sz="1800" spc="-1" strike="noStrike">
               <a:solidFill>
                 <a:srgbClr val="ffffff"/>
@@ -17030,7 +17912,7 @@
         <p:spPr>
           <a:xfrm>
             <a:off x="7498080" y="1170360"/>
-            <a:ext cx="1298160" cy="347040"/>
+            <a:ext cx="1297800" cy="346680"/>
           </a:xfrm>
           <a:prstGeom prst="rect">
             <a:avLst/>
@@ -17086,7 +17968,7 @@
         <p:spPr>
           <a:xfrm>
             <a:off x="7498080" y="1517760"/>
-            <a:ext cx="1298160" cy="273960"/>
+            <a:ext cx="1297800" cy="273600"/>
           </a:xfrm>
           <a:prstGeom prst="rect">
             <a:avLst/>
@@ -17142,7 +18024,7 @@
         <p:spPr>
           <a:xfrm>
             <a:off x="274320" y="1965960"/>
-            <a:ext cx="8595000" cy="365400"/>
+            <a:ext cx="8594640" cy="365040"/>
           </a:xfrm>
           <a:prstGeom prst="rect">
             <a:avLst/>
@@ -17198,7 +18080,7 @@
         <p:spPr>
           <a:xfrm>
             <a:off x="274320" y="2377440"/>
-            <a:ext cx="8595000" cy="2468520"/>
+            <a:ext cx="8594640" cy="2468160"/>
           </a:xfrm>
           <a:prstGeom prst="roundRect">
             <a:avLst>
@@ -17228,6 +18110,11 @@
             <a:noAutofit/>
           </a:bodyPr>
           <a:p>
+            <a:pPr>
+              <a:lnSpc>
+                <a:spcPct val="100000"/>
+              </a:lnSpc>
+            </a:pPr>
             <a:endParaRPr b="0" lang="fr-FR" sz="1800" spc="-1" strike="noStrike">
               <a:solidFill>
                 <a:srgbClr val="ffffff"/>
@@ -17246,7 +18133,7 @@
         <p:spPr>
           <a:xfrm>
             <a:off x="457200" y="2468880"/>
-            <a:ext cx="8229240" cy="2285640"/>
+            <a:ext cx="8228880" cy="2285280"/>
           </a:xfrm>
           <a:prstGeom prst="rect">
             <a:avLst/>
@@ -17267,6 +18154,11 @@
             <a:noAutofit/>
           </a:bodyPr>
           <a:p>
+            <a:pPr>
+              <a:lnSpc>
+                <a:spcPct val="100000"/>
+              </a:lnSpc>
+            </a:pPr>
             <a:r>
               <a:rPr b="0" lang="en-US" sz="1100" spc="-1" strike="noStrike">
                 <a:solidFill>
@@ -17295,6 +18187,11 @@
             </a:endParaRPr>
           </a:p>
           <a:p>
+            <a:pPr>
+              <a:lnSpc>
+                <a:spcPct val="100000"/>
+              </a:lnSpc>
+            </a:pPr>
             <a:endParaRPr b="0" lang="fr-FR" sz="1100" spc="-1" strike="noStrike">
               <a:solidFill>
                 <a:srgbClr val="ffffff"/>
@@ -17303,6 +18200,11 @@
             </a:endParaRPr>
           </a:p>
           <a:p>
+            <a:pPr>
+              <a:lnSpc>
+                <a:spcPct val="100000"/>
+              </a:lnSpc>
+            </a:pPr>
             <a:r>
               <a:rPr b="0" lang="en-US" sz="1100" spc="-1" strike="noStrike">
                 <a:solidFill>
@@ -17321,6 +18223,11 @@
             </a:endParaRPr>
           </a:p>
           <a:p>
+            <a:pPr>
+              <a:lnSpc>
+                <a:spcPct val="100000"/>
+              </a:lnSpc>
+            </a:pPr>
             <a:r>
               <a:rPr b="0" lang="en-US" sz="1100" spc="-1" strike="noStrike">
                 <a:solidFill>
@@ -17389,6 +18296,11 @@
             </a:endParaRPr>
           </a:p>
           <a:p>
+            <a:pPr>
+              <a:lnSpc>
+                <a:spcPct val="100000"/>
+              </a:lnSpc>
+            </a:pPr>
             <a:r>
               <a:rPr b="0" lang="en-US" sz="1100" spc="-1" strike="noStrike">
                 <a:solidFill>
@@ -17560,7 +18472,7 @@
         <p:spPr>
           <a:xfrm>
             <a:off x="0" y="0"/>
-            <a:ext cx="9143640" cy="1005480"/>
+            <a:ext cx="9143280" cy="1005120"/>
           </a:xfrm>
           <a:prstGeom prst="roundRect">
             <a:avLst>
@@ -17588,6 +18500,11 @@
             <a:noAutofit/>
           </a:bodyPr>
           <a:p>
+            <a:pPr>
+              <a:lnSpc>
+                <a:spcPct val="100000"/>
+              </a:lnSpc>
+            </a:pPr>
             <a:endParaRPr b="0" lang="fr-FR" sz="1800" spc="-1" strike="noStrike">
               <a:solidFill>
                 <a:srgbClr val="ffffff"/>
@@ -17606,7 +18523,7 @@
         <p:spPr>
           <a:xfrm>
             <a:off x="182880" y="137160"/>
-            <a:ext cx="731160" cy="731160"/>
+            <a:ext cx="730800" cy="730800"/>
           </a:xfrm>
           <a:prstGeom prst="ellipse">
             <a:avLst/>
@@ -17632,6 +18549,11 @@
             <a:noAutofit/>
           </a:bodyPr>
           <a:p>
+            <a:pPr>
+              <a:lnSpc>
+                <a:spcPct val="100000"/>
+              </a:lnSpc>
+            </a:pPr>
             <a:endParaRPr b="0" lang="fr-FR" sz="1800" spc="-1" strike="noStrike">
               <a:solidFill>
                 <a:srgbClr val="000000"/>
@@ -17650,7 +18572,7 @@
         <p:spPr>
           <a:xfrm>
             <a:off x="182880" y="137160"/>
-            <a:ext cx="731160" cy="731160"/>
+            <a:ext cx="730800" cy="730800"/>
           </a:xfrm>
           <a:prstGeom prst="rect">
             <a:avLst/>
@@ -17706,7 +18628,7 @@
         <p:spPr>
           <a:xfrm>
             <a:off x="1097280" y="137160"/>
-            <a:ext cx="7772040" cy="731160"/>
+            <a:ext cx="7771680" cy="730800"/>
           </a:xfrm>
           <a:prstGeom prst="rect">
             <a:avLst/>
@@ -17762,7 +18684,7 @@
         <p:spPr>
           <a:xfrm>
             <a:off x="274320" y="1097280"/>
-            <a:ext cx="8595000" cy="776880"/>
+            <a:ext cx="8594640" cy="776520"/>
           </a:xfrm>
           <a:prstGeom prst="roundRect">
             <a:avLst>
@@ -17792,6 +18714,11 @@
             <a:noAutofit/>
           </a:bodyPr>
           <a:p>
+            <a:pPr>
+              <a:lnSpc>
+                <a:spcPct val="100000"/>
+              </a:lnSpc>
+            </a:pPr>
             <a:endParaRPr b="0" lang="fr-FR" sz="1800" spc="-1" strike="noStrike">
               <a:solidFill>
                 <a:srgbClr val="ffffff"/>
@@ -17810,7 +18737,7 @@
         <p:spPr>
           <a:xfrm>
             <a:off x="457200" y="1143000"/>
-            <a:ext cx="8229240" cy="685440"/>
+            <a:ext cx="8228880" cy="685080"/>
           </a:xfrm>
           <a:prstGeom prst="rect">
             <a:avLst/>
@@ -17893,7 +18820,7 @@
         <p:spPr>
           <a:xfrm>
             <a:off x="274320" y="2011680"/>
-            <a:ext cx="8595000" cy="502560"/>
+            <a:ext cx="8594640" cy="502200"/>
           </a:xfrm>
           <a:prstGeom prst="roundRect">
             <a:avLst>
@@ -17923,6 +18850,11 @@
             <a:noAutofit/>
           </a:bodyPr>
           <a:p>
+            <a:pPr>
+              <a:lnSpc>
+                <a:spcPct val="100000"/>
+              </a:lnSpc>
+            </a:pPr>
             <a:endParaRPr b="0" lang="fr-FR" sz="1800" spc="-1" strike="noStrike">
               <a:solidFill>
                 <a:srgbClr val="ffffff"/>
@@ -17941,7 +18873,7 @@
         <p:spPr>
           <a:xfrm>
             <a:off x="320040" y="2048400"/>
-            <a:ext cx="3017160" cy="420120"/>
+            <a:ext cx="3016800" cy="419760"/>
           </a:xfrm>
           <a:prstGeom prst="roundRect">
             <a:avLst>
@@ -17971,6 +18903,11 @@
             <a:noAutofit/>
           </a:bodyPr>
           <a:p>
+            <a:pPr>
+              <a:lnSpc>
+                <a:spcPct val="100000"/>
+              </a:lnSpc>
+            </a:pPr>
             <a:endParaRPr b="0" lang="fr-FR" sz="1800" spc="-1" strike="noStrike">
               <a:solidFill>
                 <a:srgbClr val="ffffff"/>
@@ -17989,7 +18926,7 @@
         <p:spPr>
           <a:xfrm>
             <a:off x="411480" y="2048400"/>
-            <a:ext cx="2925720" cy="420120"/>
+            <a:ext cx="2925360" cy="419760"/>
           </a:xfrm>
           <a:prstGeom prst="rect">
             <a:avLst/>
@@ -18046,7 +18983,7 @@
         <p:spPr>
           <a:xfrm>
             <a:off x="3474720" y="2011680"/>
-            <a:ext cx="5303160" cy="502560"/>
+            <a:ext cx="5302800" cy="502200"/>
           </a:xfrm>
           <a:prstGeom prst="rect">
             <a:avLst/>
@@ -18102,7 +19039,7 @@
         <p:spPr>
           <a:xfrm>
             <a:off x="274320" y="2597040"/>
-            <a:ext cx="8595000" cy="502560"/>
+            <a:ext cx="8594640" cy="502200"/>
           </a:xfrm>
           <a:prstGeom prst="roundRect">
             <a:avLst>
@@ -18132,6 +19069,11 @@
             <a:noAutofit/>
           </a:bodyPr>
           <a:p>
+            <a:pPr>
+              <a:lnSpc>
+                <a:spcPct val="100000"/>
+              </a:lnSpc>
+            </a:pPr>
             <a:endParaRPr b="0" lang="fr-FR" sz="1800" spc="-1" strike="noStrike">
               <a:solidFill>
                 <a:srgbClr val="ffffff"/>
@@ -18150,7 +19092,7 @@
         <p:spPr>
           <a:xfrm>
             <a:off x="320040" y="2633400"/>
-            <a:ext cx="3017160" cy="420120"/>
+            <a:ext cx="3016800" cy="419760"/>
           </a:xfrm>
           <a:prstGeom prst="roundRect">
             <a:avLst>
@@ -18180,6 +19122,11 @@
             <a:noAutofit/>
           </a:bodyPr>
           <a:p>
+            <a:pPr>
+              <a:lnSpc>
+                <a:spcPct val="100000"/>
+              </a:lnSpc>
+            </a:pPr>
             <a:endParaRPr b="0" lang="fr-FR" sz="1800" spc="-1" strike="noStrike">
               <a:solidFill>
                 <a:srgbClr val="ffffff"/>
@@ -18198,7 +19145,7 @@
         <p:spPr>
           <a:xfrm>
             <a:off x="411480" y="2633400"/>
-            <a:ext cx="2925720" cy="420120"/>
+            <a:ext cx="2925360" cy="419760"/>
           </a:xfrm>
           <a:prstGeom prst="rect">
             <a:avLst/>
@@ -18255,7 +19202,7 @@
         <p:spPr>
           <a:xfrm>
             <a:off x="3474720" y="2597040"/>
-            <a:ext cx="5303160" cy="502560"/>
+            <a:ext cx="5302800" cy="502200"/>
           </a:xfrm>
           <a:prstGeom prst="rect">
             <a:avLst/>
@@ -18311,7 +19258,7 @@
         <p:spPr>
           <a:xfrm>
             <a:off x="274320" y="3182040"/>
-            <a:ext cx="8595000" cy="502560"/>
+            <a:ext cx="8594640" cy="502200"/>
           </a:xfrm>
           <a:prstGeom prst="roundRect">
             <a:avLst>
@@ -18341,6 +19288,11 @@
             <a:noAutofit/>
           </a:bodyPr>
           <a:p>
+            <a:pPr>
+              <a:lnSpc>
+                <a:spcPct val="100000"/>
+              </a:lnSpc>
+            </a:pPr>
             <a:endParaRPr b="0" lang="fr-FR" sz="1800" spc="-1" strike="noStrike">
               <a:solidFill>
                 <a:srgbClr val="ffffff"/>
@@ -18359,7 +19311,7 @@
         <p:spPr>
           <a:xfrm>
             <a:off x="320040" y="3218760"/>
-            <a:ext cx="3017160" cy="420120"/>
+            <a:ext cx="3016800" cy="419760"/>
           </a:xfrm>
           <a:prstGeom prst="roundRect">
             <a:avLst>
@@ -18389,6 +19341,11 @@
             <a:noAutofit/>
           </a:bodyPr>
           <a:p>
+            <a:pPr>
+              <a:lnSpc>
+                <a:spcPct val="100000"/>
+              </a:lnSpc>
+            </a:pPr>
             <a:endParaRPr b="0" lang="fr-FR" sz="1800" spc="-1" strike="noStrike">
               <a:solidFill>
                 <a:srgbClr val="ffffff"/>
@@ -18407,7 +19364,7 @@
         <p:spPr>
           <a:xfrm>
             <a:off x="411480" y="3218760"/>
-            <a:ext cx="2925720" cy="420120"/>
+            <a:ext cx="2925360" cy="419760"/>
           </a:xfrm>
           <a:prstGeom prst="rect">
             <a:avLst/>
@@ -18464,7 +19421,7 @@
         <p:spPr>
           <a:xfrm>
             <a:off x="3474720" y="3182040"/>
-            <a:ext cx="5303160" cy="502560"/>
+            <a:ext cx="5302800" cy="502200"/>
           </a:xfrm>
           <a:prstGeom prst="rect">
             <a:avLst/>
@@ -18520,7 +19477,7 @@
         <p:spPr>
           <a:xfrm>
             <a:off x="274320" y="3767400"/>
-            <a:ext cx="8595000" cy="502560"/>
+            <a:ext cx="8594640" cy="502200"/>
           </a:xfrm>
           <a:prstGeom prst="roundRect">
             <a:avLst>
@@ -18550,6 +19507,11 @@
             <a:noAutofit/>
           </a:bodyPr>
           <a:p>
+            <a:pPr>
+              <a:lnSpc>
+                <a:spcPct val="100000"/>
+              </a:lnSpc>
+            </a:pPr>
             <a:endParaRPr b="0" lang="fr-FR" sz="1800" spc="-1" strike="noStrike">
               <a:solidFill>
                 <a:srgbClr val="ffffff"/>
@@ -18568,7 +19530,7 @@
         <p:spPr>
           <a:xfrm>
             <a:off x="320040" y="3803760"/>
-            <a:ext cx="3017160" cy="420120"/>
+            <a:ext cx="3016800" cy="419760"/>
           </a:xfrm>
           <a:prstGeom prst="roundRect">
             <a:avLst>
@@ -18598,6 +19560,11 @@
             <a:noAutofit/>
           </a:bodyPr>
           <a:p>
+            <a:pPr>
+              <a:lnSpc>
+                <a:spcPct val="100000"/>
+              </a:lnSpc>
+            </a:pPr>
             <a:endParaRPr b="0" lang="fr-FR" sz="1800" spc="-1" strike="noStrike">
               <a:solidFill>
                 <a:srgbClr val="ffffff"/>
@@ -18616,7 +19583,7 @@
         <p:spPr>
           <a:xfrm>
             <a:off x="411480" y="3803760"/>
-            <a:ext cx="2925720" cy="420120"/>
+            <a:ext cx="2925360" cy="419760"/>
           </a:xfrm>
           <a:prstGeom prst="rect">
             <a:avLst/>
@@ -18673,7 +19640,7 @@
         <p:spPr>
           <a:xfrm>
             <a:off x="3474720" y="3767400"/>
-            <a:ext cx="5303160" cy="502560"/>
+            <a:ext cx="5302800" cy="502200"/>
           </a:xfrm>
           <a:prstGeom prst="rect">
             <a:avLst/>
@@ -18729,7 +19696,7 @@
         <p:spPr>
           <a:xfrm>
             <a:off x="274320" y="4352400"/>
-            <a:ext cx="8595000" cy="502560"/>
+            <a:ext cx="8594640" cy="502200"/>
           </a:xfrm>
           <a:prstGeom prst="roundRect">
             <a:avLst>
@@ -18759,6 +19726,11 @@
             <a:noAutofit/>
           </a:bodyPr>
           <a:p>
+            <a:pPr>
+              <a:lnSpc>
+                <a:spcPct val="100000"/>
+              </a:lnSpc>
+            </a:pPr>
             <a:endParaRPr b="0" lang="fr-FR" sz="1800" spc="-1" strike="noStrike">
               <a:solidFill>
                 <a:srgbClr val="ffffff"/>
@@ -18777,7 +19749,7 @@
         <p:spPr>
           <a:xfrm>
             <a:off x="320040" y="4389120"/>
-            <a:ext cx="3017160" cy="420120"/>
+            <a:ext cx="3016800" cy="419760"/>
           </a:xfrm>
           <a:prstGeom prst="roundRect">
             <a:avLst>
@@ -18807,6 +19779,11 @@
             <a:noAutofit/>
           </a:bodyPr>
           <a:p>
+            <a:pPr>
+              <a:lnSpc>
+                <a:spcPct val="100000"/>
+              </a:lnSpc>
+            </a:pPr>
             <a:endParaRPr b="0" lang="fr-FR" sz="1800" spc="-1" strike="noStrike">
               <a:solidFill>
                 <a:srgbClr val="ffffff"/>
@@ -18825,7 +19802,7 @@
         <p:spPr>
           <a:xfrm>
             <a:off x="411480" y="4389120"/>
-            <a:ext cx="2925720" cy="420120"/>
+            <a:ext cx="2925360" cy="419760"/>
           </a:xfrm>
           <a:prstGeom prst="rect">
             <a:avLst/>
@@ -18882,7 +19859,7 @@
         <p:spPr>
           <a:xfrm>
             <a:off x="3474720" y="4352400"/>
-            <a:ext cx="5303160" cy="502560"/>
+            <a:ext cx="5302800" cy="502200"/>
           </a:xfrm>
           <a:prstGeom prst="rect">
             <a:avLst/>
@@ -18975,7 +19952,7 @@
         <p:spPr>
           <a:xfrm>
             <a:off x="0" y="0"/>
-            <a:ext cx="9143640" cy="1005480"/>
+            <a:ext cx="9143280" cy="1005120"/>
           </a:xfrm>
           <a:prstGeom prst="roundRect">
             <a:avLst>
@@ -19003,6 +19980,11 @@
             <a:noAutofit/>
           </a:bodyPr>
           <a:p>
+            <a:pPr>
+              <a:lnSpc>
+                <a:spcPct val="100000"/>
+              </a:lnSpc>
+            </a:pPr>
             <a:endParaRPr b="0" lang="fr-FR" sz="1800" spc="-1" strike="noStrike">
               <a:solidFill>
                 <a:srgbClr val="ffffff"/>
@@ -19021,7 +20003,7 @@
         <p:spPr>
           <a:xfrm>
             <a:off x="182880" y="137160"/>
-            <a:ext cx="731160" cy="731160"/>
+            <a:ext cx="730800" cy="730800"/>
           </a:xfrm>
           <a:prstGeom prst="ellipse">
             <a:avLst/>
@@ -19047,6 +20029,11 @@
             <a:noAutofit/>
           </a:bodyPr>
           <a:p>
+            <a:pPr>
+              <a:lnSpc>
+                <a:spcPct val="100000"/>
+              </a:lnSpc>
+            </a:pPr>
             <a:endParaRPr b="0" lang="fr-FR" sz="1800" spc="-1" strike="noStrike">
               <a:solidFill>
                 <a:srgbClr val="000000"/>
@@ -19065,7 +20052,7 @@
         <p:spPr>
           <a:xfrm>
             <a:off x="182880" y="137160"/>
-            <a:ext cx="731160" cy="731160"/>
+            <a:ext cx="730800" cy="730800"/>
           </a:xfrm>
           <a:prstGeom prst="rect">
             <a:avLst/>
@@ -19121,7 +20108,7 @@
         <p:spPr>
           <a:xfrm>
             <a:off x="1097280" y="137160"/>
-            <a:ext cx="7772040" cy="731160"/>
+            <a:ext cx="7771680" cy="730800"/>
           </a:xfrm>
           <a:prstGeom prst="rect">
             <a:avLst/>
@@ -19177,7 +20164,7 @@
         <p:spPr>
           <a:xfrm>
             <a:off x="274320" y="1097280"/>
-            <a:ext cx="4388760" cy="365400"/>
+            <a:ext cx="4388400" cy="365040"/>
           </a:xfrm>
           <a:prstGeom prst="rect">
             <a:avLst/>
@@ -19233,7 +20220,7 @@
         <p:spPr>
           <a:xfrm>
             <a:off x="274320" y="1508760"/>
-            <a:ext cx="4388760" cy="3291480"/>
+            <a:ext cx="4388400" cy="3291120"/>
           </a:xfrm>
           <a:prstGeom prst="roundRect">
             <a:avLst>
@@ -19263,6 +20250,11 @@
             <a:noAutofit/>
           </a:bodyPr>
           <a:p>
+            <a:pPr>
+              <a:lnSpc>
+                <a:spcPct val="100000"/>
+              </a:lnSpc>
+            </a:pPr>
             <a:endParaRPr b="0" lang="fr-FR" sz="1800" spc="-1" strike="noStrike">
               <a:solidFill>
                 <a:srgbClr val="ffffff"/>
@@ -19281,7 +20273,7 @@
         <p:spPr>
           <a:xfrm>
             <a:off x="457200" y="1600200"/>
-            <a:ext cx="4114440" cy="3108600"/>
+            <a:ext cx="4114080" cy="3108240"/>
           </a:xfrm>
           <a:prstGeom prst="rect">
             <a:avLst/>
@@ -19302,6 +20294,11 @@
             <a:noAutofit/>
           </a:bodyPr>
           <a:p>
+            <a:pPr>
+              <a:lnSpc>
+                <a:spcPct val="100000"/>
+              </a:lnSpc>
+            </a:pPr>
             <a:r>
               <a:rPr b="0" lang="en-US" sz="1100" spc="-1" strike="noStrike">
                 <a:solidFill>
@@ -19320,6 +20317,11 @@
             </a:endParaRPr>
           </a:p>
           <a:p>
+            <a:pPr>
+              <a:lnSpc>
+                <a:spcPct val="100000"/>
+              </a:lnSpc>
+            </a:pPr>
             <a:r>
               <a:rPr b="0" lang="en-US" sz="1100" spc="-1" strike="noStrike">
                 <a:solidFill>
@@ -19358,6 +20360,11 @@
             </a:endParaRPr>
           </a:p>
           <a:p>
+            <a:pPr>
+              <a:lnSpc>
+                <a:spcPct val="100000"/>
+              </a:lnSpc>
+            </a:pPr>
             <a:r>
               <a:rPr b="0" lang="en-US" sz="1100" spc="-1" strike="noStrike">
                 <a:solidFill>
@@ -19396,6 +20403,11 @@
             </a:endParaRPr>
           </a:p>
           <a:p>
+            <a:pPr>
+              <a:lnSpc>
+                <a:spcPct val="100000"/>
+              </a:lnSpc>
+            </a:pPr>
             <a:r>
               <a:rPr b="0" lang="en-US" sz="1100" spc="-1" strike="noStrike">
                 <a:solidFill>
@@ -19454,6 +20466,11 @@
             </a:endParaRPr>
           </a:p>
           <a:p>
+            <a:pPr>
+              <a:lnSpc>
+                <a:spcPct val="100000"/>
+              </a:lnSpc>
+            </a:pPr>
             <a:r>
               <a:rPr b="0" lang="en-US" sz="1100" spc="-1" strike="noStrike">
                 <a:solidFill>
@@ -19502,6 +20519,11 @@
             </a:endParaRPr>
           </a:p>
           <a:p>
+            <a:pPr>
+              <a:lnSpc>
+                <a:spcPct val="100000"/>
+              </a:lnSpc>
+            </a:pPr>
             <a:r>
               <a:rPr b="0" lang="en-US" sz="1100" spc="-1" strike="noStrike">
                 <a:solidFill>
@@ -19530,6 +20552,11 @@
             </a:endParaRPr>
           </a:p>
           <a:p>
+            <a:pPr>
+              <a:lnSpc>
+                <a:spcPct val="100000"/>
+              </a:lnSpc>
+            </a:pPr>
             <a:r>
               <a:rPr b="0" lang="en-US" sz="1100" spc="-1" strike="noStrike">
                 <a:solidFill>
@@ -19794,7 +20821,7 @@
         <p:spPr>
           <a:xfrm>
             <a:off x="4937760" y="1097280"/>
-            <a:ext cx="3931560" cy="365400"/>
+            <a:ext cx="3931200" cy="365040"/>
           </a:xfrm>
           <a:prstGeom prst="rect">
             <a:avLst/>
@@ -19850,7 +20877,7 @@
         <p:spPr>
           <a:xfrm>
             <a:off x="4937760" y="1508760"/>
-            <a:ext cx="3931560" cy="1645560"/>
+            <a:ext cx="3931200" cy="1645200"/>
           </a:xfrm>
           <a:prstGeom prst="roundRect">
             <a:avLst>
@@ -19880,6 +20907,11 @@
             <a:noAutofit/>
           </a:bodyPr>
           <a:p>
+            <a:pPr>
+              <a:lnSpc>
+                <a:spcPct val="100000"/>
+              </a:lnSpc>
+            </a:pPr>
             <a:endParaRPr b="0" lang="fr-FR" sz="1800" spc="-1" strike="noStrike">
               <a:solidFill>
                 <a:srgbClr val="ffffff"/>
@@ -19898,7 +20930,7 @@
         <p:spPr>
           <a:xfrm>
             <a:off x="5074920" y="1600200"/>
-            <a:ext cx="3657240" cy="1462680"/>
+            <a:ext cx="3656880" cy="1462320"/>
           </a:xfrm>
           <a:prstGeom prst="rect">
             <a:avLst/>
@@ -19919,6 +20951,11 @@
             <a:noAutofit/>
           </a:bodyPr>
           <a:p>
+            <a:pPr>
+              <a:lnSpc>
+                <a:spcPct val="100000"/>
+              </a:lnSpc>
+            </a:pPr>
             <a:r>
               <a:rPr b="0" lang="en-US" sz="1100" spc="-1" strike="noStrike">
                 <a:solidFill>
@@ -19957,6 +20994,11 @@
             </a:endParaRPr>
           </a:p>
           <a:p>
+            <a:pPr>
+              <a:lnSpc>
+                <a:spcPct val="100000"/>
+              </a:lnSpc>
+            </a:pPr>
             <a:endParaRPr b="0" lang="fr-FR" sz="1100" spc="-1" strike="noStrike">
               <a:solidFill>
                 <a:srgbClr val="ffffff"/>
@@ -19965,6 +21007,11 @@
             </a:endParaRPr>
           </a:p>
           <a:p>
+            <a:pPr>
+              <a:lnSpc>
+                <a:spcPct val="100000"/>
+              </a:lnSpc>
+            </a:pPr>
             <a:r>
               <a:rPr b="0" lang="en-US" sz="1100" spc="-1" strike="noStrike">
                 <a:solidFill>
@@ -19993,6 +21040,11 @@
             </a:endParaRPr>
           </a:p>
           <a:p>
+            <a:pPr>
+              <a:lnSpc>
+                <a:spcPct val="100000"/>
+              </a:lnSpc>
+            </a:pPr>
             <a:r>
               <a:rPr b="0" lang="en-US" sz="1100" spc="-1" strike="noStrike">
                 <a:solidFill>
@@ -20021,6 +21073,11 @@
             </a:endParaRPr>
           </a:p>
           <a:p>
+            <a:pPr>
+              <a:lnSpc>
+                <a:spcPct val="100000"/>
+              </a:lnSpc>
+            </a:pPr>
             <a:endParaRPr b="0" lang="fr-FR" sz="1100" spc="-1" strike="noStrike">
               <a:solidFill>
                 <a:srgbClr val="ffffff"/>
@@ -20095,7 +21152,7 @@
         <p:spPr>
           <a:xfrm>
             <a:off x="4937760" y="3291840"/>
-            <a:ext cx="3931560" cy="347040"/>
+            <a:ext cx="3931200" cy="346680"/>
           </a:xfrm>
           <a:prstGeom prst="roundRect">
             <a:avLst>
@@ -20125,6 +21182,11 @@
             <a:noAutofit/>
           </a:bodyPr>
           <a:p>
+            <a:pPr>
+              <a:lnSpc>
+                <a:spcPct val="100000"/>
+              </a:lnSpc>
+            </a:pPr>
             <a:endParaRPr b="0" lang="fr-FR" sz="1800" spc="-1" strike="noStrike">
               <a:solidFill>
                 <a:srgbClr val="ffffff"/>
@@ -20143,7 +21205,7 @@
         <p:spPr>
           <a:xfrm>
             <a:off x="5029200" y="3346560"/>
-            <a:ext cx="228240" cy="228240"/>
+            <a:ext cx="227880" cy="227880"/>
           </a:xfrm>
           <a:prstGeom prst="ellipse">
             <a:avLst/>
@@ -20169,6 +21231,11 @@
             <a:noAutofit/>
           </a:bodyPr>
           <a:p>
+            <a:pPr>
+              <a:lnSpc>
+                <a:spcPct val="100000"/>
+              </a:lnSpc>
+            </a:pPr>
             <a:endParaRPr b="0" lang="fr-FR" sz="1800" spc="-1" strike="noStrike">
               <a:solidFill>
                 <a:srgbClr val="ffffff"/>
@@ -20187,7 +21254,7 @@
         <p:spPr>
           <a:xfrm>
             <a:off x="5349240" y="3291840"/>
-            <a:ext cx="3428640" cy="347040"/>
+            <a:ext cx="3428280" cy="346680"/>
           </a:xfrm>
           <a:prstGeom prst="rect">
             <a:avLst/>
@@ -20243,7 +21310,7 @@
         <p:spPr>
           <a:xfrm>
             <a:off x="4937760" y="3703320"/>
-            <a:ext cx="3931560" cy="347040"/>
+            <a:ext cx="3931200" cy="346680"/>
           </a:xfrm>
           <a:prstGeom prst="roundRect">
             <a:avLst>
@@ -20273,6 +21340,11 @@
             <a:noAutofit/>
           </a:bodyPr>
           <a:p>
+            <a:pPr>
+              <a:lnSpc>
+                <a:spcPct val="100000"/>
+              </a:lnSpc>
+            </a:pPr>
             <a:endParaRPr b="0" lang="fr-FR" sz="1800" spc="-1" strike="noStrike">
               <a:solidFill>
                 <a:srgbClr val="ffffff"/>
@@ -20291,7 +21363,7 @@
         <p:spPr>
           <a:xfrm>
             <a:off x="5029200" y="3758040"/>
-            <a:ext cx="228240" cy="228240"/>
+            <a:ext cx="227880" cy="227880"/>
           </a:xfrm>
           <a:prstGeom prst="ellipse">
             <a:avLst/>
@@ -20317,6 +21389,11 @@
             <a:noAutofit/>
           </a:bodyPr>
           <a:p>
+            <a:pPr>
+              <a:lnSpc>
+                <a:spcPct val="100000"/>
+              </a:lnSpc>
+            </a:pPr>
             <a:endParaRPr b="0" lang="fr-FR" sz="1800" spc="-1" strike="noStrike">
               <a:solidFill>
                 <a:srgbClr val="ffffff"/>
@@ -20335,7 +21412,7 @@
         <p:spPr>
           <a:xfrm>
             <a:off x="5349240" y="3703320"/>
-            <a:ext cx="3428640" cy="347040"/>
+            <a:ext cx="3428280" cy="346680"/>
           </a:xfrm>
           <a:prstGeom prst="rect">
             <a:avLst/>
@@ -20391,7 +21468,7 @@
         <p:spPr>
           <a:xfrm>
             <a:off x="4937760" y="4114800"/>
-            <a:ext cx="3931560" cy="347040"/>
+            <a:ext cx="3931200" cy="346680"/>
           </a:xfrm>
           <a:prstGeom prst="roundRect">
             <a:avLst>
@@ -20421,6 +21498,11 @@
             <a:noAutofit/>
           </a:bodyPr>
           <a:p>
+            <a:pPr>
+              <a:lnSpc>
+                <a:spcPct val="100000"/>
+              </a:lnSpc>
+            </a:pPr>
             <a:endParaRPr b="0" lang="fr-FR" sz="1800" spc="-1" strike="noStrike">
               <a:solidFill>
                 <a:srgbClr val="ffffff"/>
@@ -20439,7 +21521,7 @@
         <p:spPr>
           <a:xfrm>
             <a:off x="5029200" y="4169520"/>
-            <a:ext cx="228240" cy="228240"/>
+            <a:ext cx="227880" cy="227880"/>
           </a:xfrm>
           <a:prstGeom prst="ellipse">
             <a:avLst/>
@@ -20465,6 +21547,11 @@
             <a:noAutofit/>
           </a:bodyPr>
           <a:p>
+            <a:pPr>
+              <a:lnSpc>
+                <a:spcPct val="100000"/>
+              </a:lnSpc>
+            </a:pPr>
             <a:endParaRPr b="0" lang="fr-FR" sz="1800" spc="-1" strike="noStrike">
               <a:solidFill>
                 <a:srgbClr val="ffffff"/>
@@ -20483,7 +21570,7 @@
         <p:spPr>
           <a:xfrm>
             <a:off x="5349240" y="4114800"/>
-            <a:ext cx="3428640" cy="347040"/>
+            <a:ext cx="3428280" cy="346680"/>
           </a:xfrm>
           <a:prstGeom prst="rect">
             <a:avLst/>
@@ -20539,7 +21626,7 @@
         <p:spPr>
           <a:xfrm>
             <a:off x="4937760" y="4526280"/>
-            <a:ext cx="3931560" cy="347040"/>
+            <a:ext cx="3931200" cy="346680"/>
           </a:xfrm>
           <a:prstGeom prst="roundRect">
             <a:avLst>
@@ -20569,6 +21656,11 @@
             <a:noAutofit/>
           </a:bodyPr>
           <a:p>
+            <a:pPr>
+              <a:lnSpc>
+                <a:spcPct val="100000"/>
+              </a:lnSpc>
+            </a:pPr>
             <a:endParaRPr b="0" lang="fr-FR" sz="1800" spc="-1" strike="noStrike">
               <a:solidFill>
                 <a:srgbClr val="ffffff"/>
@@ -20587,7 +21679,7 @@
         <p:spPr>
           <a:xfrm>
             <a:off x="5029200" y="4581000"/>
-            <a:ext cx="228240" cy="228240"/>
+            <a:ext cx="227880" cy="227880"/>
           </a:xfrm>
           <a:prstGeom prst="ellipse">
             <a:avLst/>
@@ -20613,6 +21705,11 @@
             <a:noAutofit/>
           </a:bodyPr>
           <a:p>
+            <a:pPr>
+              <a:lnSpc>
+                <a:spcPct val="100000"/>
+              </a:lnSpc>
+            </a:pPr>
             <a:endParaRPr b="0" lang="fr-FR" sz="1800" spc="-1" strike="noStrike">
               <a:solidFill>
                 <a:srgbClr val="ffffff"/>
@@ -20631,7 +21728,7 @@
         <p:spPr>
           <a:xfrm>
             <a:off x="5349240" y="4526280"/>
-            <a:ext cx="3428640" cy="347040"/>
+            <a:ext cx="3428280" cy="346680"/>
           </a:xfrm>
           <a:prstGeom prst="rect">
             <a:avLst/>
